--- a/S1-CL1-Cloud-Design-Build/delivery/topic_08/Topic_08b_Slides.pptx
+++ b/S1-CL1-Cloud-Design-Build/delivery/topic_08/Topic_08b_Slides.pptx
@@ -4455,7 +4455,7 @@
           <a:noFill/>
         </p:spPr>
         <p:txBody>
-          <a:bodyPr wrap="square" anchor="t" lIns="0" rIns="0" tIns="0" bIns="0">
+          <a:bodyPr wrap="square" anchor="ctr" lIns="0" rIns="0" tIns="0" bIns="0">
             <a:spAutoFit/>
           </a:bodyPr>
           <a:lstStyle/>
@@ -4472,7 +4472,7 @@
               </a:spcAft>
             </a:pPr>
             <a:r>
-              <a:rPr sz="1800" b="1" i="0">
+              <a:rPr sz="2400" b="1" i="0">
                 <a:solidFill>
                   <a:srgbClr val="EDAB0C"/>
                 </a:solidFill>
@@ -4481,7 +4481,7 @@
               <a:t>■  </a:t>
             </a:r>
             <a:r>
-              <a:rPr sz="1800" b="0" i="0">
+              <a:rPr sz="2400" b="0" i="0">
                 <a:solidFill>
                   <a:srgbClr val="2A2929"/>
                 </a:solidFill>
@@ -4503,7 +4503,7 @@
               </a:spcAft>
             </a:pPr>
             <a:r>
-              <a:rPr sz="1800" b="1" i="0">
+              <a:rPr sz="2400" b="1" i="0">
                 <a:solidFill>
                   <a:srgbClr val="27B5CE"/>
                 </a:solidFill>
@@ -4512,7 +4512,7 @@
               <a:t>■  </a:t>
             </a:r>
             <a:r>
-              <a:rPr sz="1800" b="1" i="0">
+              <a:rPr sz="2400" b="1" i="0">
                 <a:solidFill>
                   <a:srgbClr val="27B5CE"/>
                 </a:solidFill>
@@ -4534,7 +4534,7 @@
               </a:spcAft>
             </a:pPr>
             <a:r>
-              <a:rPr sz="1800" b="1" i="0">
+              <a:rPr sz="2400" b="1" i="0">
                 <a:solidFill>
                   <a:srgbClr val="EDAB0C"/>
                 </a:solidFill>
@@ -4543,7 +4543,7 @@
               <a:t>■  </a:t>
             </a:r>
             <a:r>
-              <a:rPr sz="1800" b="0" i="0">
+              <a:rPr sz="2400" b="0" i="0">
                 <a:solidFill>
                   <a:srgbClr val="2A2929"/>
                 </a:solidFill>
@@ -4565,7 +4565,7 @@
               </a:spcAft>
             </a:pPr>
             <a:r>
-              <a:rPr sz="1800" b="1" i="0">
+              <a:rPr sz="2400" b="1" i="0">
                 <a:solidFill>
                   <a:srgbClr val="EDAB0C"/>
                 </a:solidFill>
@@ -4574,7 +4574,7 @@
               <a:t>■  </a:t>
             </a:r>
             <a:r>
-              <a:rPr sz="1800" b="0" i="0">
+              <a:rPr sz="2400" b="0" i="0">
                 <a:solidFill>
                   <a:srgbClr val="2A2929"/>
                 </a:solidFill>
@@ -4844,7 +4844,7 @@
           <a:noFill/>
         </p:spPr>
         <p:txBody>
-          <a:bodyPr wrap="square" anchor="t" lIns="0" rIns="0" tIns="0" bIns="0">
+          <a:bodyPr wrap="square" anchor="ctr" lIns="0" rIns="0" tIns="0" bIns="0">
             <a:spAutoFit/>
           </a:bodyPr>
           <a:lstStyle/>
@@ -4861,7 +4861,7 @@
               </a:spcAft>
             </a:pPr>
             <a:r>
-              <a:rPr sz="1800" b="1" i="0">
+              <a:rPr sz="2400" b="1" i="0">
                 <a:solidFill>
                   <a:srgbClr val="EDAB0C"/>
                 </a:solidFill>
@@ -4870,7 +4870,7 @@
               <a:t>■  </a:t>
             </a:r>
             <a:r>
-              <a:rPr sz="1800" b="0" i="0">
+              <a:rPr sz="2400" b="0" i="0">
                 <a:solidFill>
                   <a:srgbClr val="2A2929"/>
                 </a:solidFill>
@@ -4892,7 +4892,7 @@
               </a:spcAft>
             </a:pPr>
             <a:r>
-              <a:rPr sz="1800" b="1" i="0">
+              <a:rPr sz="2400" b="1" i="0">
                 <a:solidFill>
                   <a:srgbClr val="EDAB0C"/>
                 </a:solidFill>
@@ -4901,7 +4901,7 @@
               <a:t>■  </a:t>
             </a:r>
             <a:r>
-              <a:rPr sz="1800" b="0" i="0">
+              <a:rPr sz="2400" b="0" i="0">
                 <a:solidFill>
                   <a:srgbClr val="2A2929"/>
                 </a:solidFill>
@@ -4923,7 +4923,7 @@
               </a:spcAft>
             </a:pPr>
             <a:r>
-              <a:rPr sz="1800" b="1" i="0">
+              <a:rPr sz="2400" b="1" i="0">
                 <a:solidFill>
                   <a:srgbClr val="27B5CE"/>
                 </a:solidFill>
@@ -4932,7 +4932,7 @@
               <a:t>■  </a:t>
             </a:r>
             <a:r>
-              <a:rPr sz="1800" b="1" i="0">
+              <a:rPr sz="2400" b="1" i="0">
                 <a:solidFill>
                   <a:srgbClr val="27B5CE"/>
                 </a:solidFill>
@@ -4954,7 +4954,7 @@
               </a:spcAft>
             </a:pPr>
             <a:r>
-              <a:rPr sz="1800" b="1" i="0">
+              <a:rPr sz="2400" b="1" i="0">
                 <a:solidFill>
                   <a:srgbClr val="EDAB0C"/>
                 </a:solidFill>
@@ -4963,7 +4963,7 @@
               <a:t>■  </a:t>
             </a:r>
             <a:r>
-              <a:rPr sz="1800" b="0" i="0">
+              <a:rPr sz="2400" b="0" i="0">
                 <a:solidFill>
                   <a:srgbClr val="2A2929"/>
                 </a:solidFill>
@@ -5233,7 +5233,7 @@
           <a:noFill/>
         </p:spPr>
         <p:txBody>
-          <a:bodyPr wrap="square" anchor="t" lIns="0" rIns="0" tIns="0" bIns="0">
+          <a:bodyPr wrap="square" anchor="ctr" lIns="0" rIns="0" tIns="0" bIns="0">
             <a:spAutoFit/>
           </a:bodyPr>
           <a:lstStyle/>
@@ -5250,7 +5250,7 @@
               </a:spcAft>
             </a:pPr>
             <a:r>
-              <a:rPr sz="1800" b="1" i="0">
+              <a:rPr sz="2400" b="1" i="0">
                 <a:solidFill>
                   <a:srgbClr val="EDAB0C"/>
                 </a:solidFill>
@@ -5259,7 +5259,7 @@
               <a:t>■  </a:t>
             </a:r>
             <a:r>
-              <a:rPr sz="1800" b="0" i="0">
+              <a:rPr sz="2400" b="0" i="0">
                 <a:solidFill>
                   <a:srgbClr val="2A2929"/>
                 </a:solidFill>
@@ -5281,7 +5281,7 @@
               </a:spcAft>
             </a:pPr>
             <a:r>
-              <a:rPr sz="1800" b="1" i="0">
+              <a:rPr sz="2400" b="1" i="0">
                 <a:solidFill>
                   <a:srgbClr val="27B5CE"/>
                 </a:solidFill>
@@ -5290,7 +5290,7 @@
               <a:t>■  </a:t>
             </a:r>
             <a:r>
-              <a:rPr sz="1800" b="1" i="0">
+              <a:rPr sz="2400" b="1" i="0">
                 <a:solidFill>
                   <a:srgbClr val="27B5CE"/>
                 </a:solidFill>
@@ -5312,7 +5312,7 @@
               </a:spcAft>
             </a:pPr>
             <a:r>
-              <a:rPr sz="1800" b="1" i="0">
+              <a:rPr sz="2400" b="1" i="0">
                 <a:solidFill>
                   <a:srgbClr val="EDAB0C"/>
                 </a:solidFill>
@@ -5321,7 +5321,7 @@
               <a:t>■  </a:t>
             </a:r>
             <a:r>
-              <a:rPr sz="1800" b="0" i="0">
+              <a:rPr sz="2400" b="0" i="0">
                 <a:solidFill>
                   <a:srgbClr val="2A2929"/>
                 </a:solidFill>
@@ -5343,7 +5343,7 @@
               </a:spcAft>
             </a:pPr>
             <a:r>
-              <a:rPr sz="1800" b="1" i="0">
+              <a:rPr sz="2400" b="1" i="0">
                 <a:solidFill>
                   <a:srgbClr val="EDAB0C"/>
                 </a:solidFill>
@@ -5352,7 +5352,7 @@
               <a:t>■  </a:t>
             </a:r>
             <a:r>
-              <a:rPr sz="1800" b="0" i="0">
+              <a:rPr sz="2400" b="0" i="0">
                 <a:solidFill>
                   <a:srgbClr val="2A2929"/>
                 </a:solidFill>
@@ -5622,7 +5622,7 @@
           <a:noFill/>
         </p:spPr>
         <p:txBody>
-          <a:bodyPr wrap="square" anchor="t" lIns="0" rIns="0" tIns="0" bIns="0">
+          <a:bodyPr wrap="square" anchor="ctr" lIns="0" rIns="0" tIns="0" bIns="0">
             <a:spAutoFit/>
           </a:bodyPr>
           <a:lstStyle/>
@@ -5639,7 +5639,7 @@
               </a:spcAft>
             </a:pPr>
             <a:r>
-              <a:rPr sz="1800" b="1" i="0">
+              <a:rPr sz="2400" b="1" i="0">
                 <a:solidFill>
                   <a:srgbClr val="EDAB0C"/>
                 </a:solidFill>
@@ -5648,7 +5648,7 @@
               <a:t>■  </a:t>
             </a:r>
             <a:r>
-              <a:rPr sz="1800" b="0" i="0">
+              <a:rPr sz="2400" b="0" i="0">
                 <a:solidFill>
                   <a:srgbClr val="2A2929"/>
                 </a:solidFill>
@@ -5670,7 +5670,7 @@
               </a:spcAft>
             </a:pPr>
             <a:r>
-              <a:rPr sz="1800" b="1" i="0">
+              <a:rPr sz="2400" b="1" i="0">
                 <a:solidFill>
                   <a:srgbClr val="EDAB0C"/>
                 </a:solidFill>
@@ -5679,7 +5679,7 @@
               <a:t>■  </a:t>
             </a:r>
             <a:r>
-              <a:rPr sz="1800" b="0" i="0">
+              <a:rPr sz="2400" b="0" i="0">
                 <a:solidFill>
                   <a:srgbClr val="2A2929"/>
                 </a:solidFill>
@@ -5701,7 +5701,7 @@
               </a:spcAft>
             </a:pPr>
             <a:r>
-              <a:rPr sz="1800" b="1" i="0">
+              <a:rPr sz="2400" b="1" i="0">
                 <a:solidFill>
                   <a:srgbClr val="27B5CE"/>
                 </a:solidFill>
@@ -5710,7 +5710,7 @@
               <a:t>■  </a:t>
             </a:r>
             <a:r>
-              <a:rPr sz="1800" b="1" i="0">
+              <a:rPr sz="2400" b="1" i="0">
                 <a:solidFill>
                   <a:srgbClr val="27B5CE"/>
                 </a:solidFill>
@@ -5732,7 +5732,7 @@
               </a:spcAft>
             </a:pPr>
             <a:r>
-              <a:rPr sz="1800" b="1" i="0">
+              <a:rPr sz="2400" b="1" i="0">
                 <a:solidFill>
                   <a:srgbClr val="EDAB0C"/>
                 </a:solidFill>
@@ -5741,7 +5741,7 @@
               <a:t>■  </a:t>
             </a:r>
             <a:r>
-              <a:rPr sz="1800" b="0" i="0">
+              <a:rPr sz="2400" b="0" i="0">
                 <a:solidFill>
                   <a:srgbClr val="2A2929"/>
                 </a:solidFill>
@@ -8668,7 +8668,7 @@
           <a:noFill/>
         </p:spPr>
         <p:txBody>
-          <a:bodyPr wrap="square" anchor="t" lIns="0" rIns="0" tIns="0" bIns="0">
+          <a:bodyPr wrap="square" anchor="ctr" lIns="0" rIns="0" tIns="0" bIns="0">
             <a:spAutoFit/>
           </a:bodyPr>
           <a:lstStyle/>
@@ -8685,7 +8685,7 @@
               </a:spcAft>
             </a:pPr>
             <a:r>
-              <a:rPr sz="1800" b="1" i="0">
+              <a:rPr sz="2400" b="1" i="0">
                 <a:solidFill>
                   <a:srgbClr val="EDAB0C"/>
                 </a:solidFill>
@@ -8694,7 +8694,7 @@
               <a:t>■  </a:t>
             </a:r>
             <a:r>
-              <a:rPr sz="1800" b="0" i="0">
+              <a:rPr sz="2400" b="0" i="0">
                 <a:solidFill>
                   <a:srgbClr val="2A2929"/>
                 </a:solidFill>
@@ -8716,7 +8716,7 @@
               </a:spcAft>
             </a:pPr>
             <a:r>
-              <a:rPr sz="1800" b="1" i="0">
+              <a:rPr sz="2400" b="1" i="0">
                 <a:solidFill>
                   <a:srgbClr val="92268F"/>
                 </a:solidFill>
@@ -8725,7 +8725,7 @@
               <a:t>■  </a:t>
             </a:r>
             <a:r>
-              <a:rPr sz="1800" b="1" i="0">
+              <a:rPr sz="2400" b="1" i="0">
                 <a:solidFill>
                   <a:srgbClr val="92268F"/>
                 </a:solidFill>
@@ -8747,7 +8747,7 @@
               </a:spcAft>
             </a:pPr>
             <a:r>
-              <a:rPr sz="1800" b="1" i="0">
+              <a:rPr sz="2400" b="1" i="0">
                 <a:solidFill>
                   <a:srgbClr val="EDAB0C"/>
                 </a:solidFill>
@@ -8756,7 +8756,7 @@
               <a:t>■  </a:t>
             </a:r>
             <a:r>
-              <a:rPr sz="1800" b="0" i="0">
+              <a:rPr sz="2400" b="0" i="0">
                 <a:solidFill>
                   <a:srgbClr val="2A2929"/>
                 </a:solidFill>
@@ -8778,7 +8778,7 @@
               </a:spcAft>
             </a:pPr>
             <a:r>
-              <a:rPr sz="1800" b="1" i="0">
+              <a:rPr sz="2400" b="1" i="0">
                 <a:solidFill>
                   <a:srgbClr val="EDAB0C"/>
                 </a:solidFill>
@@ -8787,7 +8787,7 @@
               <a:t>■  </a:t>
             </a:r>
             <a:r>
-              <a:rPr sz="1800" b="0" i="0">
+              <a:rPr sz="2400" b="0" i="0">
                 <a:solidFill>
                   <a:srgbClr val="2A2929"/>
                 </a:solidFill>
@@ -9491,7 +9491,7 @@
           <a:noFill/>
         </p:spPr>
         <p:txBody>
-          <a:bodyPr wrap="square" anchor="t" lIns="0" rIns="0" tIns="0" bIns="0">
+          <a:bodyPr wrap="square" anchor="ctr" lIns="0" rIns="0" tIns="0" bIns="0">
             <a:spAutoFit/>
           </a:bodyPr>
           <a:lstStyle/>
@@ -9508,7 +9508,7 @@
               </a:spcAft>
             </a:pPr>
             <a:r>
-              <a:rPr sz="1800" b="1" i="0">
+              <a:rPr sz="2400" b="1" i="0">
                 <a:solidFill>
                   <a:srgbClr val="EDAB0C"/>
                 </a:solidFill>
@@ -9517,7 +9517,7 @@
               <a:t>■  </a:t>
             </a:r>
             <a:r>
-              <a:rPr sz="1800" b="0" i="0">
+              <a:rPr sz="2400" b="0" i="0">
                 <a:solidFill>
                   <a:srgbClr val="2A2929"/>
                 </a:solidFill>
@@ -9539,7 +9539,7 @@
               </a:spcAft>
             </a:pPr>
             <a:r>
-              <a:rPr sz="1800" b="1" i="0">
+              <a:rPr sz="2400" b="1" i="0">
                 <a:solidFill>
                   <a:srgbClr val="EDAB0C"/>
                 </a:solidFill>
@@ -9548,7 +9548,7 @@
               <a:t>■  </a:t>
             </a:r>
             <a:r>
-              <a:rPr sz="1800" b="0" i="0">
+              <a:rPr sz="2400" b="0" i="0">
                 <a:solidFill>
                   <a:srgbClr val="2A2929"/>
                 </a:solidFill>
@@ -9570,7 +9570,7 @@
               </a:spcAft>
             </a:pPr>
             <a:r>
-              <a:rPr sz="1800" b="1" i="0">
+              <a:rPr sz="2400" b="1" i="0">
                 <a:solidFill>
                   <a:srgbClr val="92268F"/>
                 </a:solidFill>
@@ -9579,7 +9579,7 @@
               <a:t>■  </a:t>
             </a:r>
             <a:r>
-              <a:rPr sz="1800" b="1" i="0">
+              <a:rPr sz="2400" b="1" i="0">
                 <a:solidFill>
                   <a:srgbClr val="92268F"/>
                 </a:solidFill>
@@ -9849,7 +9849,7 @@
           <a:noFill/>
         </p:spPr>
         <p:txBody>
-          <a:bodyPr wrap="square" anchor="t" lIns="0" rIns="0" tIns="0" bIns="0">
+          <a:bodyPr wrap="square" anchor="ctr" lIns="0" rIns="0" tIns="0" bIns="0">
             <a:spAutoFit/>
           </a:bodyPr>
           <a:lstStyle/>
@@ -9866,7 +9866,7 @@
               </a:spcAft>
             </a:pPr>
             <a:r>
-              <a:rPr sz="1800" b="1" i="0">
+              <a:rPr sz="2400" b="1" i="0">
                 <a:solidFill>
                   <a:srgbClr val="EDAB0C"/>
                 </a:solidFill>
@@ -9875,7 +9875,7 @@
               <a:t>■  </a:t>
             </a:r>
             <a:r>
-              <a:rPr sz="1800" b="0" i="0">
+              <a:rPr sz="2400" b="0" i="0">
                 <a:solidFill>
                   <a:srgbClr val="2A2929"/>
                 </a:solidFill>
@@ -9897,7 +9897,7 @@
               </a:spcAft>
             </a:pPr>
             <a:r>
-              <a:rPr sz="1800" b="1" i="0">
+              <a:rPr sz="2400" b="1" i="0">
                 <a:solidFill>
                   <a:srgbClr val="92268F"/>
                 </a:solidFill>
@@ -9906,7 +9906,7 @@
               <a:t>■  </a:t>
             </a:r>
             <a:r>
-              <a:rPr sz="1800" b="1" i="0">
+              <a:rPr sz="2400" b="1" i="0">
                 <a:solidFill>
                   <a:srgbClr val="92268F"/>
                 </a:solidFill>
@@ -9928,7 +9928,7 @@
               </a:spcAft>
             </a:pPr>
             <a:r>
-              <a:rPr sz="1800" b="1" i="0">
+              <a:rPr sz="2400" b="1" i="0">
                 <a:solidFill>
                   <a:srgbClr val="EDAB0C"/>
                 </a:solidFill>
@@ -9937,7 +9937,7 @@
               <a:t>■  </a:t>
             </a:r>
             <a:r>
-              <a:rPr sz="1800" b="0" i="0">
+              <a:rPr sz="2400" b="0" i="0">
                 <a:solidFill>
                   <a:srgbClr val="2A2929"/>
                 </a:solidFill>
@@ -9959,7 +9959,7 @@
               </a:spcAft>
             </a:pPr>
             <a:r>
-              <a:rPr sz="1800" b="1" i="0">
+              <a:rPr sz="2400" b="1" i="0">
                 <a:solidFill>
                   <a:srgbClr val="EDAB0C"/>
                 </a:solidFill>
@@ -9968,7 +9968,7 @@
               <a:t>■  </a:t>
             </a:r>
             <a:r>
-              <a:rPr sz="1800" b="0" i="0">
+              <a:rPr sz="2400" b="0" i="0">
                 <a:solidFill>
                   <a:srgbClr val="2A2929"/>
                 </a:solidFill>
@@ -10238,7 +10238,7 @@
           <a:noFill/>
         </p:spPr>
         <p:txBody>
-          <a:bodyPr wrap="square" anchor="t" lIns="0" rIns="0" tIns="0" bIns="0">
+          <a:bodyPr wrap="square" anchor="ctr" lIns="0" rIns="0" tIns="0" bIns="0">
             <a:spAutoFit/>
           </a:bodyPr>
           <a:lstStyle/>
@@ -10255,7 +10255,7 @@
               </a:spcAft>
             </a:pPr>
             <a:r>
-              <a:rPr sz="1800" b="1" i="0">
+              <a:rPr sz="2400" b="1" i="0">
                 <a:solidFill>
                   <a:srgbClr val="EDAB0C"/>
                 </a:solidFill>
@@ -10264,7 +10264,7 @@
               <a:t>■  </a:t>
             </a:r>
             <a:r>
-              <a:rPr sz="1800" b="0" i="0">
+              <a:rPr sz="2400" b="0" i="0">
                 <a:solidFill>
                   <a:srgbClr val="2A2929"/>
                 </a:solidFill>
@@ -10286,7 +10286,7 @@
               </a:spcAft>
             </a:pPr>
             <a:r>
-              <a:rPr sz="1800" b="1" i="0">
+              <a:rPr sz="2400" b="1" i="0">
                 <a:solidFill>
                   <a:srgbClr val="EDAB0C"/>
                 </a:solidFill>
@@ -10295,7 +10295,7 @@
               <a:t>■  </a:t>
             </a:r>
             <a:r>
-              <a:rPr sz="1800" b="0" i="0">
+              <a:rPr sz="2400" b="0" i="0">
                 <a:solidFill>
                   <a:srgbClr val="2A2929"/>
                 </a:solidFill>
@@ -10317,7 +10317,7 @@
               </a:spcAft>
             </a:pPr>
             <a:r>
-              <a:rPr sz="1800" b="1" i="0">
+              <a:rPr sz="2400" b="1" i="0">
                 <a:solidFill>
                   <a:srgbClr val="EDAB0C"/>
                 </a:solidFill>
@@ -10326,7 +10326,7 @@
               <a:t>■  </a:t>
             </a:r>
             <a:r>
-              <a:rPr sz="1800" b="0" i="0">
+              <a:rPr sz="2400" b="0" i="0">
                 <a:solidFill>
                   <a:srgbClr val="2A2929"/>
                 </a:solidFill>
@@ -10348,7 +10348,7 @@
               </a:spcAft>
             </a:pPr>
             <a:r>
-              <a:rPr sz="1800" b="1" i="0">
+              <a:rPr sz="2400" b="1" i="0">
                 <a:solidFill>
                   <a:srgbClr val="92268F"/>
                 </a:solidFill>
@@ -10357,7 +10357,7 @@
               <a:t>■  </a:t>
             </a:r>
             <a:r>
-              <a:rPr sz="1800" b="1" i="0">
+              <a:rPr sz="2400" b="1" i="0">
                 <a:solidFill>
                   <a:srgbClr val="92268F"/>
                 </a:solidFill>
@@ -10627,7 +10627,7 @@
           <a:noFill/>
         </p:spPr>
         <p:txBody>
-          <a:bodyPr wrap="square" anchor="t" lIns="0" rIns="0" tIns="0" bIns="0">
+          <a:bodyPr wrap="square" anchor="ctr" lIns="0" rIns="0" tIns="0" bIns="0">
             <a:spAutoFit/>
           </a:bodyPr>
           <a:lstStyle/>
@@ -10644,7 +10644,7 @@
               </a:spcAft>
             </a:pPr>
             <a:r>
-              <a:rPr sz="1800" b="1" i="0">
+              <a:rPr sz="2400" b="1" i="0">
                 <a:solidFill>
                   <a:srgbClr val="EDAB0C"/>
                 </a:solidFill>
@@ -10653,7 +10653,7 @@
               <a:t>■  </a:t>
             </a:r>
             <a:r>
-              <a:rPr sz="1800" b="0" i="0">
+              <a:rPr sz="2400" b="0" i="0">
                 <a:solidFill>
                   <a:srgbClr val="2A2929"/>
                 </a:solidFill>
@@ -10675,7 +10675,7 @@
               </a:spcAft>
             </a:pPr>
             <a:r>
-              <a:rPr sz="1800" b="1" i="0">
+              <a:rPr sz="2400" b="1" i="0">
                 <a:solidFill>
                   <a:srgbClr val="EDAB0C"/>
                 </a:solidFill>
@@ -10684,7 +10684,7 @@
               <a:t>■  </a:t>
             </a:r>
             <a:r>
-              <a:rPr sz="1800" b="0" i="0">
+              <a:rPr sz="2400" b="0" i="0">
                 <a:solidFill>
                   <a:srgbClr val="2A2929"/>
                 </a:solidFill>
@@ -10706,7 +10706,7 @@
               </a:spcAft>
             </a:pPr>
             <a:r>
-              <a:rPr sz="1800" b="1" i="0">
+              <a:rPr sz="2400" b="1" i="0">
                 <a:solidFill>
                   <a:srgbClr val="EDAB0C"/>
                 </a:solidFill>
@@ -10715,7 +10715,7 @@
               <a:t>■  </a:t>
             </a:r>
             <a:r>
-              <a:rPr sz="1800" b="0" i="0">
+              <a:rPr sz="2400" b="0" i="0">
                 <a:solidFill>
                   <a:srgbClr val="2A2929"/>
                 </a:solidFill>
@@ -10737,7 +10737,7 @@
               </a:spcAft>
             </a:pPr>
             <a:r>
-              <a:rPr sz="1800" b="1" i="0">
+              <a:rPr sz="2400" b="1" i="0">
                 <a:solidFill>
                   <a:srgbClr val="92268F"/>
                 </a:solidFill>
@@ -10746,7 +10746,7 @@
               <a:t>■  </a:t>
             </a:r>
             <a:r>
-              <a:rPr sz="1800" b="1" i="0">
+              <a:rPr sz="2400" b="1" i="0">
                 <a:solidFill>
                   <a:srgbClr val="92268F"/>
                 </a:solidFill>

--- a/S1-CL1-Cloud-Design-Build/delivery/topic_08/Topic_08b_Slides.pptx
+++ b/S1-CL1-Cloud-Design-Build/delivery/topic_08/Topic_08b_Slides.pptx
@@ -7,24 +7,24 @@
   <p:sldIdLst>
     <p:sldId id="256" r:id="rId7"/>
     <p:sldId id="257" r:id="rId8"/>
-    <p:sldId id="258" r:id="rId9"/>
-    <p:sldId id="259" r:id="rId10"/>
-    <p:sldId id="260" r:id="rId11"/>
-    <p:sldId id="261" r:id="rId12"/>
-    <p:sldId id="262" r:id="rId13"/>
-    <p:sldId id="263" r:id="rId14"/>
-    <p:sldId id="264" r:id="rId15"/>
-    <p:sldId id="265" r:id="rId16"/>
-    <p:sldId id="266" r:id="rId17"/>
-    <p:sldId id="267" r:id="rId18"/>
-    <p:sldId id="268" r:id="rId19"/>
-    <p:sldId id="269" r:id="rId20"/>
-    <p:sldId id="270" r:id="rId21"/>
-    <p:sldId id="271" r:id="rId22"/>
-    <p:sldId id="272" r:id="rId23"/>
-    <p:sldId id="273" r:id="rId24"/>
-    <p:sldId id="274" r:id="rId25"/>
-    <p:sldId id="275" r:id="rId26"/>
+    <p:sldId id="258" r:id="rId10"/>
+    <p:sldId id="259" r:id="rId11"/>
+    <p:sldId id="260" r:id="rId12"/>
+    <p:sldId id="261" r:id="rId13"/>
+    <p:sldId id="262" r:id="rId14"/>
+    <p:sldId id="263" r:id="rId15"/>
+    <p:sldId id="264" r:id="rId16"/>
+    <p:sldId id="265" r:id="rId17"/>
+    <p:sldId id="266" r:id="rId18"/>
+    <p:sldId id="267" r:id="rId19"/>
+    <p:sldId id="268" r:id="rId20"/>
+    <p:sldId id="269" r:id="rId21"/>
+    <p:sldId id="270" r:id="rId22"/>
+    <p:sldId id="271" r:id="rId23"/>
+    <p:sldId id="272" r:id="rId24"/>
+    <p:sldId id="273" r:id="rId25"/>
+    <p:sldId id="274" r:id="rId26"/>
+    <p:sldId id="275" r:id="rId27"/>
   </p:sldIdLst>
   <p:sldSz cx="12191695" cy="6858000" type="screen4x3"/>
   <p:notesSz cx="6858000" cy="9144000"/>
@@ -124,6 +124,2262 @@
     </a:lvl9pPr>
   </p:defaultTextStyle>
 </p:presentation>
+</file>
+
+<file path=ppt/notesMasters/notesMaster1.xml><?xml version="1.0" encoding="utf-8"?>
+<p:notesMaster xmlns:a="http://schemas.openxmlformats.org/drawingml/2006/main" xmlns:p="http://schemas.openxmlformats.org/presentationml/2006/main" xmlns:r="http://schemas.openxmlformats.org/officeDocument/2006/relationships">
+  <p:cSld>
+    <p:bg>
+      <p:bgRef idx="1001">
+        <a:schemeClr val="bg1"/>
+      </p:bgRef>
+    </p:bg>
+    <p:spTree>
+      <p:nvGrpSpPr>
+        <p:cNvPr id="1" name=""/>
+        <p:cNvGrpSpPr/>
+        <p:nvPr/>
+      </p:nvGrpSpPr>
+      <p:grpSpPr>
+        <a:xfrm>
+          <a:off x="0" y="0"/>
+          <a:ext cx="0" cy="0"/>
+          <a:chOff x="0" y="0"/>
+          <a:chExt cx="0" cy="0"/>
+        </a:xfrm>
+      </p:grpSpPr>
+      <p:sp>
+        <p:nvSpPr>
+          <p:cNvPr id="2" name="Header Placeholder 1"/>
+          <p:cNvSpPr>
+            <a:spLocks noGrp="1"/>
+          </p:cNvSpPr>
+          <p:nvPr>
+            <p:ph type="hdr" sz="quarter"/>
+          </p:nvPr>
+        </p:nvSpPr>
+        <p:spPr>
+          <a:xfrm>
+            <a:off x="0" y="0"/>
+            <a:ext cx="2971800" cy="457200"/>
+          </a:xfrm>
+          <a:prstGeom prst="rect">
+            <a:avLst/>
+          </a:prstGeom>
+        </p:spPr>
+        <p:txBody>
+          <a:bodyPr vert="horz" lIns="91440" tIns="45720" rIns="91440" bIns="45720" rtlCol="0"/>
+          <a:lstStyle>
+            <a:lvl1pPr algn="l">
+              <a:defRPr sz="1200"/>
+            </a:lvl1pPr>
+          </a:lstStyle>
+          <a:p>
+            <a:endParaRPr lang="en-US"/>
+          </a:p>
+        </p:txBody>
+      </p:sp>
+      <p:sp>
+        <p:nvSpPr>
+          <p:cNvPr id="3" name="Date Placeholder 2"/>
+          <p:cNvSpPr>
+            <a:spLocks noGrp="1"/>
+          </p:cNvSpPr>
+          <p:nvPr>
+            <p:ph type="dt" idx="1"/>
+          </p:nvPr>
+        </p:nvSpPr>
+        <p:spPr>
+          <a:xfrm>
+            <a:off x="3884613" y="0"/>
+            <a:ext cx="2971800" cy="457200"/>
+          </a:xfrm>
+          <a:prstGeom prst="rect">
+            <a:avLst/>
+          </a:prstGeom>
+        </p:spPr>
+        <p:txBody>
+          <a:bodyPr vert="horz" lIns="91440" tIns="45720" rIns="91440" bIns="45720" rtlCol="0"/>
+          <a:lstStyle>
+            <a:lvl1pPr algn="r">
+              <a:defRPr sz="1200"/>
+            </a:lvl1pPr>
+          </a:lstStyle>
+          <a:p>
+            <a:fld id="{0F89C1C7-3DCD-1040-A9CF-14679D8B5DDD}" type="datetimeFigureOut">
+              <a:rPr lang="en-US" smtClean="0"/>
+              <a:t>10/17/16</a:t>
+            </a:fld>
+            <a:endParaRPr lang="en-US"/>
+          </a:p>
+        </p:txBody>
+      </p:sp>
+      <p:sp>
+        <p:nvSpPr>
+          <p:cNvPr id="4" name="Slide Image Placeholder 3"/>
+          <p:cNvSpPr>
+            <a:spLocks noGrp="1" noRot="1" noChangeAspect="1"/>
+          </p:cNvSpPr>
+          <p:nvPr>
+            <p:ph type="sldImg" idx="2"/>
+          </p:nvPr>
+        </p:nvSpPr>
+        <p:spPr>
+          <a:xfrm>
+            <a:off x="1143000" y="685800"/>
+            <a:ext cx="4572000" cy="3429000"/>
+          </a:xfrm>
+          <a:prstGeom prst="rect">
+            <a:avLst/>
+          </a:prstGeom>
+          <a:noFill/>
+          <a:ln w="12700">
+            <a:solidFill>
+              <a:prstClr val="black"/>
+            </a:solidFill>
+          </a:ln>
+        </p:spPr>
+        <p:txBody>
+          <a:bodyPr vert="horz" lIns="91440" tIns="45720" rIns="91440" bIns="45720" rtlCol="0" anchor="ctr"/>
+          <a:lstStyle/>
+          <a:p>
+            <a:endParaRPr lang="en-US"/>
+          </a:p>
+        </p:txBody>
+      </p:sp>
+      <p:sp>
+        <p:nvSpPr>
+          <p:cNvPr id="5" name="Notes Placeholder 4"/>
+          <p:cNvSpPr>
+            <a:spLocks noGrp="1"/>
+          </p:cNvSpPr>
+          <p:nvPr>
+            <p:ph type="body" sz="quarter" idx="3"/>
+          </p:nvPr>
+        </p:nvSpPr>
+        <p:spPr>
+          <a:xfrm>
+            <a:off x="685800" y="4343400"/>
+            <a:ext cx="5486400" cy="4114800"/>
+          </a:xfrm>
+          <a:prstGeom prst="rect">
+            <a:avLst/>
+          </a:prstGeom>
+        </p:spPr>
+        <p:txBody>
+          <a:bodyPr vert="horz" lIns="91440" tIns="45720" rIns="91440" bIns="45720" rtlCol="0"/>
+          <a:lstStyle/>
+          <a:p>
+            <a:pPr lvl="0"/>
+            <a:r>
+              <a:rPr lang="en-US" smtClean="0"/>
+              <a:t>Click to edit Master text styles</a:t>
+            </a:r>
+          </a:p>
+          <a:p>
+            <a:pPr lvl="1"/>
+            <a:r>
+              <a:rPr lang="en-US" smtClean="0"/>
+              <a:t>Second level</a:t>
+            </a:r>
+          </a:p>
+          <a:p>
+            <a:pPr lvl="2"/>
+            <a:r>
+              <a:rPr lang="en-US" smtClean="0"/>
+              <a:t>Third level</a:t>
+            </a:r>
+          </a:p>
+          <a:p>
+            <a:pPr lvl="3"/>
+            <a:r>
+              <a:rPr lang="en-US" smtClean="0"/>
+              <a:t>Fourth level</a:t>
+            </a:r>
+          </a:p>
+          <a:p>
+            <a:pPr lvl="4"/>
+            <a:r>
+              <a:rPr lang="en-US" smtClean="0"/>
+              <a:t>Fifth level</a:t>
+            </a:r>
+            <a:endParaRPr lang="en-US"/>
+          </a:p>
+        </p:txBody>
+      </p:sp>
+      <p:sp>
+        <p:nvSpPr>
+          <p:cNvPr id="6" name="Footer Placeholder 5"/>
+          <p:cNvSpPr>
+            <a:spLocks noGrp="1"/>
+          </p:cNvSpPr>
+          <p:nvPr>
+            <p:ph type="ftr" sz="quarter" idx="4"/>
+          </p:nvPr>
+        </p:nvSpPr>
+        <p:spPr>
+          <a:xfrm>
+            <a:off x="0" y="8685213"/>
+            <a:ext cx="2971800" cy="457200"/>
+          </a:xfrm>
+          <a:prstGeom prst="rect">
+            <a:avLst/>
+          </a:prstGeom>
+        </p:spPr>
+        <p:txBody>
+          <a:bodyPr vert="horz" lIns="91440" tIns="45720" rIns="91440" bIns="45720" rtlCol="0" anchor="b"/>
+          <a:lstStyle>
+            <a:lvl1pPr algn="l">
+              <a:defRPr sz="1200"/>
+            </a:lvl1pPr>
+          </a:lstStyle>
+          <a:p>
+            <a:endParaRPr lang="en-US"/>
+          </a:p>
+        </p:txBody>
+      </p:sp>
+      <p:sp>
+        <p:nvSpPr>
+          <p:cNvPr id="7" name="Slide Number Placeholder 6"/>
+          <p:cNvSpPr>
+            <a:spLocks noGrp="1"/>
+          </p:cNvSpPr>
+          <p:nvPr>
+            <p:ph type="sldNum" sz="quarter" idx="5"/>
+          </p:nvPr>
+        </p:nvSpPr>
+        <p:spPr>
+          <a:xfrm>
+            <a:off x="3884613" y="8685213"/>
+            <a:ext cx="2971800" cy="457200"/>
+          </a:xfrm>
+          <a:prstGeom prst="rect">
+            <a:avLst/>
+          </a:prstGeom>
+        </p:spPr>
+        <p:txBody>
+          <a:bodyPr vert="horz" lIns="91440" tIns="45720" rIns="91440" bIns="45720" rtlCol="0" anchor="b"/>
+          <a:lstStyle>
+            <a:lvl1pPr algn="r">
+              <a:defRPr sz="1200"/>
+            </a:lvl1pPr>
+          </a:lstStyle>
+          <a:p>
+            <a:fld id="{BB5E49A5-4136-284D-997B-48E1D791AD67}" type="slidenum">
+              <a:rPr lang="en-US" smtClean="0"/>
+              <a:t>‹#›</a:t>
+            </a:fld>
+            <a:endParaRPr lang="en-US"/>
+          </a:p>
+        </p:txBody>
+      </p:sp>
+    </p:spTree>
+    <p:extLst>
+      <p:ext uri="{BB962C8B-B14F-4D97-AF65-F5344CB8AC3E}">
+        <p14:creationId xmlns:p14="http://schemas.microsoft.com/office/powerpoint/2010/main" val="2623252185"/>
+      </p:ext>
+    </p:extLst>
+  </p:cSld>
+  <p:clrMap bg1="lt1" tx1="dk1" bg2="lt2" tx2="dk2" accent1="accent1" accent2="accent2" accent3="accent3" accent4="accent4" accent5="accent5" accent6="accent6" hlink="hlink" folHlink="folHlink"/>
+  <p:notesStyle>
+    <a:lvl1pPr marL="0" algn="l" defTabSz="457200" rtl="0" eaLnBrk="1" latinLnBrk="0" hangingPunct="1">
+      <a:defRPr sz="1200" kern="1200">
+        <a:solidFill>
+          <a:schemeClr val="tx1"/>
+        </a:solidFill>
+        <a:latin typeface="+mn-lt"/>
+        <a:ea typeface="+mn-ea"/>
+        <a:cs typeface="+mn-cs"/>
+      </a:defRPr>
+    </a:lvl1pPr>
+    <a:lvl2pPr marL="457200" algn="l" defTabSz="457200" rtl="0" eaLnBrk="1" latinLnBrk="0" hangingPunct="1">
+      <a:defRPr sz="1200" kern="1200">
+        <a:solidFill>
+          <a:schemeClr val="tx1"/>
+        </a:solidFill>
+        <a:latin typeface="+mn-lt"/>
+        <a:ea typeface="+mn-ea"/>
+        <a:cs typeface="+mn-cs"/>
+      </a:defRPr>
+    </a:lvl2pPr>
+    <a:lvl3pPr marL="914400" algn="l" defTabSz="457200" rtl="0" eaLnBrk="1" latinLnBrk="0" hangingPunct="1">
+      <a:defRPr sz="1200" kern="1200">
+        <a:solidFill>
+          <a:schemeClr val="tx1"/>
+        </a:solidFill>
+        <a:latin typeface="+mn-lt"/>
+        <a:ea typeface="+mn-ea"/>
+        <a:cs typeface="+mn-cs"/>
+      </a:defRPr>
+    </a:lvl3pPr>
+    <a:lvl4pPr marL="1371600" algn="l" defTabSz="457200" rtl="0" eaLnBrk="1" latinLnBrk="0" hangingPunct="1">
+      <a:defRPr sz="1200" kern="1200">
+        <a:solidFill>
+          <a:schemeClr val="tx1"/>
+        </a:solidFill>
+        <a:latin typeface="+mn-lt"/>
+        <a:ea typeface="+mn-ea"/>
+        <a:cs typeface="+mn-cs"/>
+      </a:defRPr>
+    </a:lvl4pPr>
+    <a:lvl5pPr marL="1828800" algn="l" defTabSz="457200" rtl="0" eaLnBrk="1" latinLnBrk="0" hangingPunct="1">
+      <a:defRPr sz="1200" kern="1200">
+        <a:solidFill>
+          <a:schemeClr val="tx1"/>
+        </a:solidFill>
+        <a:latin typeface="+mn-lt"/>
+        <a:ea typeface="+mn-ea"/>
+        <a:cs typeface="+mn-cs"/>
+      </a:defRPr>
+    </a:lvl5pPr>
+    <a:lvl6pPr marL="2286000" algn="l" defTabSz="457200" rtl="0" eaLnBrk="1" latinLnBrk="0" hangingPunct="1">
+      <a:defRPr sz="1200" kern="1200">
+        <a:solidFill>
+          <a:schemeClr val="tx1"/>
+        </a:solidFill>
+        <a:latin typeface="+mn-lt"/>
+        <a:ea typeface="+mn-ea"/>
+        <a:cs typeface="+mn-cs"/>
+      </a:defRPr>
+    </a:lvl6pPr>
+    <a:lvl7pPr marL="2743200" algn="l" defTabSz="457200" rtl="0" eaLnBrk="1" latinLnBrk="0" hangingPunct="1">
+      <a:defRPr sz="1200" kern="1200">
+        <a:solidFill>
+          <a:schemeClr val="tx1"/>
+        </a:solidFill>
+        <a:latin typeface="+mn-lt"/>
+        <a:ea typeface="+mn-ea"/>
+        <a:cs typeface="+mn-cs"/>
+      </a:defRPr>
+    </a:lvl7pPr>
+    <a:lvl8pPr marL="3200400" algn="l" defTabSz="457200" rtl="0" eaLnBrk="1" latinLnBrk="0" hangingPunct="1">
+      <a:defRPr sz="1200" kern="1200">
+        <a:solidFill>
+          <a:schemeClr val="tx1"/>
+        </a:solidFill>
+        <a:latin typeface="+mn-lt"/>
+        <a:ea typeface="+mn-ea"/>
+        <a:cs typeface="+mn-cs"/>
+      </a:defRPr>
+    </a:lvl8pPr>
+    <a:lvl9pPr marL="3657600" algn="l" defTabSz="457200" rtl="0" eaLnBrk="1" latinLnBrk="0" hangingPunct="1">
+      <a:defRPr sz="1200" kern="1200">
+        <a:solidFill>
+          <a:schemeClr val="tx1"/>
+        </a:solidFill>
+        <a:latin typeface="+mn-lt"/>
+        <a:ea typeface="+mn-ea"/>
+        <a:cs typeface="+mn-cs"/>
+      </a:defRPr>
+    </a:lvl9pPr>
+  </p:notesStyle>
+</p:notesMaster>
+</file>
+
+<file path=ppt/notesSlides/notesSlide1.xml><?xml version="1.0" encoding="utf-8"?>
+<p:notes xmlns:a="http://schemas.openxmlformats.org/drawingml/2006/main" xmlns:p="http://schemas.openxmlformats.org/presentationml/2006/main" xmlns:r="http://schemas.openxmlformats.org/officeDocument/2006/relationships">
+  <p:cSld>
+    <p:spTree>
+      <p:nvGrpSpPr>
+        <p:cNvPr id="1" name=""/>
+        <p:cNvGrpSpPr/>
+        <p:nvPr/>
+      </p:nvGrpSpPr>
+      <p:grpSpPr>
+        <a:xfrm>
+          <a:off x="0" y="0"/>
+          <a:ext cx="0" cy="0"/>
+          <a:chOff x="0" y="0"/>
+          <a:chExt cx="0" cy="0"/>
+        </a:xfrm>
+      </p:grpSpPr>
+      <p:sp>
+        <p:nvSpPr>
+          <p:cNvPr id="2" name="Slide Image Placeholder 1"/>
+          <p:cNvSpPr>
+            <a:spLocks noGrp="1"/>
+          </p:cNvSpPr>
+          <p:nvPr>
+            <p:ph type="sldImg" idx="2"/>
+          </p:nvPr>
+        </p:nvSpPr>
+        <p:spPr/>
+      </p:sp>
+      <p:sp>
+        <p:nvSpPr>
+          <p:cNvPr id="3" name="Notes Placeholder 2"/>
+          <p:cNvSpPr>
+            <a:spLocks noGrp="1"/>
+          </p:cNvSpPr>
+          <p:nvPr>
+            <p:ph type="body" idx="3" sz="quarter"/>
+          </p:nvPr>
+        </p:nvSpPr>
+        <p:spPr/>
+        <p:txBody>
+          <a:bodyPr/>
+          <a:lstStyle/>
+          <a:p>
+            <a:r>
+              <a:t>Set the scene for 8b — a bridge slide, not new content. Remind them where 8a left off.</a:t>
+            </a:r>
+          </a:p>
+          <a:p>
+            <a:r>
+              <a:t>• 8a stood up the COMPUTE and put it behind a scaling load balancer; the app can run and heal.</a:t>
+            </a:r>
+          </a:p>
+          <a:p>
+            <a:r>
+              <a:t>• 8b (accent-bold) adds the DATA layer: a managed database (Amazon RDS) and object/archive</a:t>
+            </a:r>
+          </a:p>
+          <a:p>
+            <a:r>
+              <a:t>  storage (Amazon S3 + Glacier). Same design, same network — now the tiers that hold the data.</a:t>
+            </a:r>
+          </a:p>
+          <a:p>
+            <a:r>
+              <a:t>• Keep the discipline explicit: still building the SUPPLIED design, still capturing evidence as</a:t>
+            </a:r>
+          </a:p>
+          <a:p>
+            <a:r>
+              <a:t>  they go. Nothing free-hand.</a:t>
+            </a:r>
+          </a:p>
+          <a:p>
+            <a:r>
+              <a:t>• Set the rhythm for the session: watch the recorded demo, then do it yourself in the lab.</a:t>
+            </a:r>
+          </a:p>
+          <a:p>
+            <a:r>
+              <a:t>Misconception to pre-empt: that the database and storage are "extra" or optional. They're core PE</a:t>
+            </a:r>
+          </a:p>
+          <a:p>
+            <a:r>
+              <a:t>— the workload tier isn't done until data + storage are built and evidenced.</a:t>
+            </a:r>
+          </a:p>
+          <a:p>
+            <a:r>
+              <a:t>Question to pose: "The app servers are up — so why can't YAT use Ledgerline yet?" (no database</a:t>
+            </a:r>
+          </a:p>
+          <a:p>
+            <a:r>
+              <a:t>for the records, no store for the scanned documents).</a:t>
+            </a:r>
+          </a:p>
+          <a:p>
+            <a:r>
+              <a:t>UoC/AT tie: sets up ICTCLD401 PC 2.5 (managed DB) + the storage KE; both fold into the core PE</a:t>
+            </a:r>
+          </a:p>
+          <a:p>
+            <a:r>
+              <a:t>(compute + storage + database + autoscaling in a VPC) that AT2 §4.7/§4.8 evidence.</a:t>
+            </a:r>
+          </a:p>
+        </p:txBody>
+      </p:sp>
+      <p:sp>
+        <p:nvSpPr>
+          <p:cNvPr id="4" name="Slide Number Placeholder 3"/>
+          <p:cNvSpPr>
+            <a:spLocks noGrp="1"/>
+          </p:cNvSpPr>
+          <p:nvPr>
+            <p:ph type="sldNum" idx="5" sz="quarter"/>
+          </p:nvPr>
+        </p:nvSpPr>
+        <p:spPr/>
+      </p:sp>
+    </p:spTree>
+  </p:cSld>
+  <p:clrMapOvr>
+    <a:masterClrMapping/>
+  </p:clrMapOvr>
+</p:notes>
+</file>
+
+<file path=ppt/notesSlides/notesSlide10.xml><?xml version="1.0" encoding="utf-8"?>
+<p:notes xmlns:a="http://schemas.openxmlformats.org/drawingml/2006/main" xmlns:p="http://schemas.openxmlformats.org/presentationml/2006/main" xmlns:r="http://schemas.openxmlformats.org/officeDocument/2006/relationships">
+  <p:cSld>
+    <p:spTree>
+      <p:nvGrpSpPr>
+        <p:cNvPr id="1" name=""/>
+        <p:cNvGrpSpPr/>
+        <p:nvPr/>
+      </p:nvGrpSpPr>
+      <p:grpSpPr>
+        <a:xfrm>
+          <a:off x="0" y="0"/>
+          <a:ext cx="0" cy="0"/>
+          <a:chOff x="0" y="0"/>
+          <a:chExt cx="0" cy="0"/>
+        </a:xfrm>
+      </p:grpSpPr>
+      <p:sp>
+        <p:nvSpPr>
+          <p:cNvPr id="2" name="Slide Image Placeholder 1"/>
+          <p:cNvSpPr>
+            <a:spLocks noGrp="1"/>
+          </p:cNvSpPr>
+          <p:nvPr>
+            <p:ph type="sldImg" idx="2"/>
+          </p:nvPr>
+        </p:nvSpPr>
+        <p:spPr/>
+      </p:sp>
+      <p:sp>
+        <p:nvSpPr>
+          <p:cNvPr id="3" name="Notes Placeholder 2"/>
+          <p:cNvSpPr>
+            <a:spLocks noGrp="1"/>
+          </p:cNvSpPr>
+          <p:nvPr>
+            <p:ph type="body" idx="3" sz="quarter"/>
+          </p:nvPr>
+        </p:nvSpPr>
+        <p:spPr/>
+        <p:txBody>
+          <a:bodyPr/>
+          <a:lstStyle/>
+          <a:p>
+            <a:r>
+              <a:t>Teach the retention mechanism — this is how the design meets a hard business/legal requirement, so</a:t>
+            </a:r>
+          </a:p>
+          <a:p>
+            <a:r>
+              <a:t>anchor it to the 7-year rule, not the feature for its own sake.</a:t>
+            </a:r>
+          </a:p>
+          <a:p>
+            <a:r>
+              <a:t>• Amazon S3 Glacier is extremely low-cost ARCHIVE storage; retrieval takes minutes to hours — cheap</a:t>
+            </a:r>
+          </a:p>
+          <a:p>
+            <a:r>
+              <a:t>  because it's cold, not instant.</a:t>
+            </a:r>
+          </a:p>
+          <a:p>
+            <a:r>
+              <a:t>• A LIFECYCLE RULE (accent-bold) transitions objects from S3 to Glacier by AGE — automatic, and</a:t>
+            </a:r>
+          </a:p>
+          <a:p>
+            <a:r>
+              <a:t>  cheaper the longer data lives. Set once, runs forever; no one moves files by hand.</a:t>
+            </a:r>
+          </a:p>
+          <a:p>
+            <a:r>
+              <a:t>• Object Lock enforces WRITE-ONCE retention — for records that must not be altered or deleted. This</a:t>
+            </a:r>
+          </a:p>
+          <a:p>
+            <a:r>
+              <a:t>  is the integrity guarantee auditors want on financial records.</a:t>
+            </a:r>
+          </a:p>
+          <a:p>
+            <a:r>
+              <a:t>• The payoff line: this is how the design meets the 7-year financial-records retention — a</a:t>
+            </a:r>
+          </a:p>
+          <a:p>
+            <a:r>
+              <a:t>  requirement, met by a rule, evidenced.</a:t>
+            </a:r>
+          </a:p>
+          <a:p>
+            <a:r>
+              <a:t>Misconception to pre-empt: "Glacier is a separate service I upload to." No — objects LAND in S3 and</a:t>
+            </a:r>
+          </a:p>
+          <a:p>
+            <a:r>
+              <a:t>a lifecycle rule TRANSITIONS them to Glacier automatically; students shouldn't upload straight to</a:t>
+            </a:r>
+          </a:p>
+          <a:p>
+            <a:r>
+              <a:t>an archive tier.</a:t>
+            </a:r>
+          </a:p>
+          <a:p>
+            <a:r>
+              <a:t>Question to pose: "Financial records must be kept 7 years and not tampered with — which two features</a:t>
+            </a:r>
+          </a:p>
+          <a:p>
+            <a:r>
+              <a:t>cover 'kept cheaply' and 'not tampered with'?" (lifecycle-to-Glacier + Object Lock).</a:t>
+            </a:r>
+          </a:p>
+          <a:p>
+            <a:r>
+              <a:t>UoC/AT tie: ICTCLD401 KE 5 (storage backups + lifecycle); directly evidenced in AT2 §4.8.</a:t>
+            </a:r>
+          </a:p>
+        </p:txBody>
+      </p:sp>
+      <p:sp>
+        <p:nvSpPr>
+          <p:cNvPr id="4" name="Slide Number Placeholder 3"/>
+          <p:cNvSpPr>
+            <a:spLocks noGrp="1"/>
+          </p:cNvSpPr>
+          <p:nvPr>
+            <p:ph type="sldNum" idx="5" sz="quarter"/>
+          </p:nvPr>
+        </p:nvSpPr>
+        <p:spPr/>
+      </p:sp>
+    </p:spTree>
+  </p:cSld>
+  <p:clrMapOvr>
+    <a:masterClrMapping/>
+  </p:clrMapOvr>
+</p:notes>
+</file>
+
+<file path=ppt/notesSlides/notesSlide11.xml><?xml version="1.0" encoding="utf-8"?>
+<p:notes xmlns:a="http://schemas.openxmlformats.org/drawingml/2006/main" xmlns:p="http://schemas.openxmlformats.org/presentationml/2006/main" xmlns:r="http://schemas.openxmlformats.org/officeDocument/2006/relationships">
+  <p:cSld>
+    <p:spTree>
+      <p:nvGrpSpPr>
+        <p:cNvPr id="1" name=""/>
+        <p:cNvGrpSpPr/>
+        <p:nvPr/>
+      </p:nvGrpSpPr>
+      <p:grpSpPr>
+        <a:xfrm>
+          <a:off x="0" y="0"/>
+          <a:ext cx="0" cy="0"/>
+          <a:chOff x="0" y="0"/>
+          <a:chExt cx="0" cy="0"/>
+        </a:xfrm>
+      </p:grpSpPr>
+      <p:sp>
+        <p:nvSpPr>
+          <p:cNvPr id="2" name="Slide Image Placeholder 1"/>
+          <p:cNvSpPr>
+            <a:spLocks noGrp="1"/>
+          </p:cNvSpPr>
+          <p:nvPr>
+            <p:ph type="sldImg" idx="2"/>
+          </p:nvPr>
+        </p:nvSpPr>
+        <p:spPr/>
+      </p:sp>
+      <p:sp>
+        <p:nvSpPr>
+          <p:cNvPr id="3" name="Notes Placeholder 2"/>
+          <p:cNvSpPr>
+            <a:spLocks noGrp="1"/>
+          </p:cNvSpPr>
+          <p:nvPr>
+            <p:ph type="body" idx="3" sz="quarter"/>
+          </p:nvPr>
+        </p:nvSpPr>
+        <p:spPr/>
+        <p:txBody>
+          <a:bodyPr/>
+          <a:lstStyle/>
+          <a:p>
+            <a:r>
+              <a:t>The design's specifics — the exact buckets and settings students create, from the supplied design.</a:t>
+            </a:r>
+          </a:p>
+          <a:p>
+            <a:r>
+              <a:t>Read as a spec.</a:t>
+            </a:r>
+          </a:p>
+          <a:p>
+            <a:r>
+              <a:t>• Documents bucket — scanned invoices / POs / supporting docs; lifecycle to Glacier for the 7-year</a:t>
+            </a:r>
+          </a:p>
+          <a:p>
+            <a:r>
+              <a:t>  hold. This bucket is where the retention rule lives.</a:t>
+            </a:r>
+          </a:p>
+          <a:p>
+            <a:r>
+              <a:t>• Backups bucket — off-instance SQL backup exports and file snapshots (complements RDS's own</a:t>
+            </a:r>
+          </a:p>
+          <a:p>
+            <a:r>
+              <a:t>  automated backups; belt and braces).</a:t>
+            </a:r>
+          </a:p>
+          <a:p>
+            <a:r>
+              <a:t>• Both buckets (accent-bold): block ALL public access; SSE(-KMS) encryption; versioning ON; access</a:t>
+            </a:r>
+          </a:p>
+          <a:p>
+            <a:r>
+              <a:t>  logging. Same three protections from the S3 teach, applied.</a:t>
+            </a:r>
+          </a:p>
+          <a:p>
+            <a:r>
+              <a:t>• Object Lock CONSIDERED for the financial-records hold — flag it as a design consideration on the</a:t>
+            </a:r>
+          </a:p>
+          <a:p>
+            <a:r>
+              <a:t>  Documents bucket, not an afterthought.</a:t>
+            </a:r>
+          </a:p>
+          <a:p>
+            <a:r>
+              <a:t>Misconception to pre-empt: "one bucket for everything." The design separates Documents (retained,</a:t>
+            </a:r>
+          </a:p>
+          <a:p>
+            <a:r>
+              <a:t>Glacier-bound) from Backups (operational) on purpose — different lifecycles, different roles.</a:t>
+            </a:r>
+          </a:p>
+          <a:p>
+            <a:r>
+              <a:t>Question to pose: "Why does the design put the lifecycle-to-Glacier rule on the Documents bucket but</a:t>
+            </a:r>
+          </a:p>
+          <a:p>
+            <a:r>
+              <a:t>not the Backups bucket?" (7-year records retention lives with the documents; backups have a</a:t>
+            </a:r>
+          </a:p>
+          <a:p>
+            <a:r>
+              <a:t>different rotation).</a:t>
+            </a:r>
+          </a:p>
+          <a:p>
+            <a:r>
+              <a:t>UoC/AT tie: ICTCLD401 KE 5/KE 6; each setting maps to AT2 §4.8 evidence.</a:t>
+            </a:r>
+          </a:p>
+        </p:txBody>
+      </p:sp>
+      <p:sp>
+        <p:nvSpPr>
+          <p:cNvPr id="4" name="Slide Number Placeholder 3"/>
+          <p:cNvSpPr>
+            <a:spLocks noGrp="1"/>
+          </p:cNvSpPr>
+          <p:nvPr>
+            <p:ph type="sldNum" idx="5" sz="quarter"/>
+          </p:nvPr>
+        </p:nvSpPr>
+        <p:spPr/>
+      </p:sp>
+    </p:spTree>
+  </p:cSld>
+  <p:clrMapOvr>
+    <a:masterClrMapping/>
+  </p:clrMapOvr>
+</p:notes>
+</file>
+
+<file path=ppt/notesSlides/notesSlide12.xml><?xml version="1.0" encoding="utf-8"?>
+<p:notes xmlns:a="http://schemas.openxmlformats.org/drawingml/2006/main" xmlns:p="http://schemas.openxmlformats.org/presentationml/2006/main" xmlns:r="http://schemas.openxmlformats.org/officeDocument/2006/relationships">
+  <p:cSld>
+    <p:spTree>
+      <p:nvGrpSpPr>
+        <p:cNvPr id="1" name=""/>
+        <p:cNvGrpSpPr/>
+        <p:nvPr/>
+      </p:nvGrpSpPr>
+      <p:grpSpPr>
+        <a:xfrm>
+          <a:off x="0" y="0"/>
+          <a:ext cx="0" cy="0"/>
+          <a:chOff x="0" y="0"/>
+          <a:chExt cx="0" cy="0"/>
+        </a:xfrm>
+      </p:grpSpPr>
+      <p:sp>
+        <p:nvSpPr>
+          <p:cNvPr id="2" name="Slide Image Placeholder 1"/>
+          <p:cNvSpPr>
+            <a:spLocks noGrp="1"/>
+          </p:cNvSpPr>
+          <p:nvPr>
+            <p:ph type="sldImg" idx="2"/>
+          </p:nvPr>
+        </p:nvSpPr>
+        <p:spPr/>
+      </p:sp>
+      <p:sp>
+        <p:nvSpPr>
+          <p:cNvPr id="3" name="Notes Placeholder 2"/>
+          <p:cNvSpPr>
+            <a:spLocks noGrp="1"/>
+          </p:cNvSpPr>
+          <p:nvPr>
+            <p:ph type="body" idx="3" sz="quarter"/>
+          </p:nvPr>
+        </p:nvSpPr>
+        <p:spPr/>
+        <p:txBody>
+          <a:bodyPr/>
+          <a:lstStyle/>
+          <a:p>
+            <a:r>
+              <a:t>WHERE TO FIND THE RECORDED DEMO: for the bucket build, AWS Academy Cloud Foundations -&gt; Module 07</a:t>
+            </a:r>
+          </a:p>
+          <a:p>
+            <a:r>
+              <a:t>(Storage) -&gt; slide 35, "Recorded demo: Amazon S3", with slide 55 "Recorded demo: Amazon S3 Glacier"</a:t>
+            </a:r>
+          </a:p>
+          <a:p>
+            <a:r>
+              <a:t>for the archive tier. For versioning + lifecycle, AWS Academy Cloud Architecting -&gt; Module 04 -&gt;</a:t>
+            </a:r>
+          </a:p>
+          <a:p>
+            <a:r>
+              <a:t>slide 36 "Demo: Managing Lifecycles in Amazon S3" and slide 43 "Demo: Amazon S3 Versioning". All in</a:t>
+            </a:r>
+          </a:p>
+          <a:p>
+            <a:r>
+              <a:t>original-materials/AWS-Instructor Presentations/… — instructor-facing, screen in class, don't</a:t>
+            </a:r>
+          </a:p>
+          <a:p>
+            <a:r>
+              <a:t>distribute. Preview and queue before class.</a:t>
+            </a:r>
+          </a:p>
+          <a:p/>
+          <a:p>
+            <a:r>
+              <a:t>WHAT TO DEMONSTRATE (follow the recorded demos, then relate each step to OUR build):</a:t>
+            </a:r>
+          </a:p>
+          <a:p>
+            <a:r>
+              <a:t>1. Create a bucket; block public access; enable encryption and versioning.</a:t>
+            </a:r>
+          </a:p>
+          <a:p>
+            <a:r>
+              <a:t>2. Add a lifecycle rule to transition objects to Glacier after an age threshold.</a:t>
+            </a:r>
+          </a:p>
+          <a:p>
+            <a:r>
+              <a:t>3. Point out Glacier is the ARCHIVE tier the lifecycle rule targets — not a separate upload.</a:t>
+            </a:r>
+          </a:p>
+          <a:p/>
+          <a:p>
+            <a:r>
+              <a:t>WHAT TO EMPHASISE:</a:t>
+            </a:r>
+          </a:p>
+          <a:p>
+            <a:r>
+              <a:t>• "Block public access" is a deliberate, evidenced click — show the toggle and say why it matters</a:t>
+            </a:r>
+          </a:p>
+          <a:p>
+            <a:r>
+              <a:t>  for financial data.</a:t>
+            </a:r>
+          </a:p>
+          <a:p>
+            <a:r>
+              <a:t>• Enable versioning BEFORE objects go in; explain it protects against overwrite/delete.</a:t>
+            </a:r>
+          </a:p>
+          <a:p>
+            <a:r>
+              <a:t>• On the lifecycle rule, tie the age threshold to the 7-year retention story — this is the design</a:t>
+            </a:r>
+          </a:p>
+          <a:p>
+            <a:r>
+              <a:t>  requirement made real (use the ACA M04 lifecycle demo here).</a:t>
+            </a:r>
+          </a:p>
+          <a:p>
+            <a:r>
+              <a:t>• Narrate the evidence capture — bucket settings, encryption, versioning, the lifecycle rule.</a:t>
+            </a:r>
+          </a:p>
+          <a:p/>
+          <a:p>
+            <a:r>
+              <a:t>PREP: clean lab, the supplied Solution Design open for the bucket names/settings, all four demo</a:t>
+            </a:r>
+          </a:p>
+          <a:p>
+            <a:r>
+              <a:t>clips queued. ~8-10 min to screen + narrate before the activity.</a:t>
+            </a:r>
+          </a:p>
+        </p:txBody>
+      </p:sp>
+      <p:sp>
+        <p:nvSpPr>
+          <p:cNvPr id="4" name="Slide Number Placeholder 3"/>
+          <p:cNvSpPr>
+            <a:spLocks noGrp="1"/>
+          </p:cNvSpPr>
+          <p:nvPr>
+            <p:ph type="sldNum" idx="5" sz="quarter"/>
+          </p:nvPr>
+        </p:nvSpPr>
+        <p:spPr/>
+      </p:sp>
+    </p:spTree>
+  </p:cSld>
+  <p:clrMapOvr>
+    <a:masterClrMapping/>
+  </p:clrMapOvr>
+</p:notes>
+</file>
+
+<file path=ppt/notesSlides/notesSlide13.xml><?xml version="1.0" encoding="utf-8"?>
+<p:notes xmlns:a="http://schemas.openxmlformats.org/drawingml/2006/main" xmlns:p="http://schemas.openxmlformats.org/presentationml/2006/main" xmlns:r="http://schemas.openxmlformats.org/officeDocument/2006/relationships">
+  <p:cSld>
+    <p:spTree>
+      <p:nvGrpSpPr>
+        <p:cNvPr id="1" name=""/>
+        <p:cNvGrpSpPr/>
+        <p:nvPr/>
+      </p:nvGrpSpPr>
+      <p:grpSpPr>
+        <a:xfrm>
+          <a:off x="0" y="0"/>
+          <a:ext cx="0" cy="0"/>
+          <a:chOff x="0" y="0"/>
+          <a:chExt cx="0" cy="0"/>
+        </a:xfrm>
+      </p:grpSpPr>
+      <p:sp>
+        <p:nvSpPr>
+          <p:cNvPr id="2" name="Slide Image Placeholder 1"/>
+          <p:cNvSpPr>
+            <a:spLocks noGrp="1"/>
+          </p:cNvSpPr>
+          <p:nvPr>
+            <p:ph type="sldImg" idx="2"/>
+          </p:nvPr>
+        </p:nvSpPr>
+        <p:spPr/>
+      </p:sp>
+      <p:sp>
+        <p:nvSpPr>
+          <p:cNvPr id="3" name="Notes Placeholder 2"/>
+          <p:cNvSpPr>
+            <a:spLocks noGrp="1"/>
+          </p:cNvSpPr>
+          <p:nvPr>
+            <p:ph type="body" idx="3" sz="quarter"/>
+          </p:nvPr>
+        </p:nvSpPr>
+        <p:spPr/>
+        <p:txBody>
+          <a:bodyPr/>
+          <a:lstStyle/>
+          <a:p>
+            <a:r>
+              <a:t>Facilitation — the C4 practice build. Students create both buckets to the design and evidence every</a:t>
+            </a:r>
+          </a:p>
+          <a:p>
+            <a:r>
+              <a:t>setting. You circulate; they build.</a:t>
+            </a:r>
+          </a:p>
+          <a:p>
+            <a:r>
+              <a:t>Tell students, in these words: "Open the lab and the Accounting Baseline Solution Design. Create</a:t>
+            </a:r>
+          </a:p>
+          <a:p>
+            <a:r>
+              <a:t>Ledgerline's storage exactly to the design — the two buckets, each locked down and versioned, with</a:t>
+            </a:r>
+          </a:p>
+          <a:p>
+            <a:r>
+              <a:t>the retention rule on Documents. Capture evidence of every setting as you go."</a:t>
+            </a:r>
+          </a:p>
+          <a:p>
+            <a:r>
+              <a:t>The task, step by step (put on the board / read out):</a:t>
+            </a:r>
+          </a:p>
+          <a:p>
+            <a:r>
+              <a:t>1. Create the Documents bucket and the Backups bucket.</a:t>
+            </a:r>
+          </a:p>
+          <a:p>
+            <a:r>
+              <a:t>2. On each: block public access; enable SSE encryption + versioning + access logging.</a:t>
+            </a:r>
+          </a:p>
+          <a:p>
+            <a:r>
+              <a:t>3. Add the lifecycle rule transitioning Documents objects to Glacier (the 7-year retention).</a:t>
+            </a:r>
+          </a:p>
+          <a:p>
+            <a:r>
+              <a:t>4. Capture evidence — bucket settings, encryption, versioning, the lifecycle rule.</a:t>
+            </a:r>
+          </a:p>
+          <a:p>
+            <a:r>
+              <a:t>MUST PRODUCE (AT2 evidence): screenshots of both buckets showing public access blocked, encryption</a:t>
+            </a:r>
+          </a:p>
+          <a:p>
+            <a:r>
+              <a:t>on, versioning on, and the Documents lifecycle-to-Glacier rule.</a:t>
+            </a:r>
+          </a:p>
+          <a:p>
+            <a:r>
+              <a:t>TIMING: ~15 min. Where they get stuck: (a) enabling versioning after uploading test objects — show</a:t>
+            </a:r>
+          </a:p>
+          <a:p>
+            <a:r>
+              <a:t>it's a per-bucket setting to turn on first; (b) the lifecycle rule on the wrong bucket — it belongs</a:t>
+            </a:r>
+          </a:p>
+          <a:p>
+            <a:r>
+              <a:t>on Documents, not Backups.</a:t>
+            </a:r>
+          </a:p>
+          <a:p>
+            <a:r>
+              <a:t>SHARE-BACK: ask one student to show a bucket with public access blocked + the Glacier lifecycle</a:t>
+            </a:r>
+          </a:p>
+          <a:p>
+            <a:r>
+              <a:t>rule; confirm nobody left a bucket public.</a:t>
+            </a:r>
+          </a:p>
+          <a:p>
+            <a:r>
+              <a:t>No-leakage note: this practice uses the Accounting / Ledgerline system; the ASSESSED build is a</a:t>
+            </a:r>
+          </a:p>
+          <a:p>
+            <a:r>
+              <a:t>different system on the LMS — comparable, not identical.</a:t>
+            </a:r>
+          </a:p>
+        </p:txBody>
+      </p:sp>
+      <p:sp>
+        <p:nvSpPr>
+          <p:cNvPr id="4" name="Slide Number Placeholder 3"/>
+          <p:cNvSpPr>
+            <a:spLocks noGrp="1"/>
+          </p:cNvSpPr>
+          <p:nvPr>
+            <p:ph type="sldNum" idx="5" sz="quarter"/>
+          </p:nvPr>
+        </p:nvSpPr>
+        <p:spPr/>
+      </p:sp>
+    </p:spTree>
+  </p:cSld>
+  <p:clrMapOvr>
+    <a:masterClrMapping/>
+  </p:clrMapOvr>
+</p:notes>
+</file>
+
+<file path=ppt/notesSlides/notesSlide2.xml><?xml version="1.0" encoding="utf-8"?>
+<p:notes xmlns:a="http://schemas.openxmlformats.org/drawingml/2006/main" xmlns:p="http://schemas.openxmlformats.org/presentationml/2006/main" xmlns:r="http://schemas.openxmlformats.org/officeDocument/2006/relationships">
+  <p:cSld>
+    <p:spTree>
+      <p:nvGrpSpPr>
+        <p:cNvPr id="1" name=""/>
+        <p:cNvGrpSpPr/>
+        <p:nvPr/>
+      </p:nvGrpSpPr>
+      <p:grpSpPr>
+        <a:xfrm>
+          <a:off x="0" y="0"/>
+          <a:ext cx="0" cy="0"/>
+          <a:chOff x="0" y="0"/>
+          <a:chExt cx="0" cy="0"/>
+        </a:xfrm>
+      </p:grpSpPr>
+      <p:sp>
+        <p:nvSpPr>
+          <p:cNvPr id="2" name="Slide Image Placeholder 1"/>
+          <p:cNvSpPr>
+            <a:spLocks noGrp="1"/>
+          </p:cNvSpPr>
+          <p:nvPr>
+            <p:ph type="sldImg" idx="2"/>
+          </p:nvPr>
+        </p:nvSpPr>
+        <p:spPr/>
+      </p:sp>
+      <p:sp>
+        <p:nvSpPr>
+          <p:cNvPr id="3" name="Notes Placeholder 2"/>
+          <p:cNvSpPr>
+            <a:spLocks noGrp="1"/>
+          </p:cNvSpPr>
+          <p:nvPr>
+            <p:ph type="body" idx="3" sz="quarter"/>
+          </p:nvPr>
+        </p:nvSpPr>
+        <p:spPr/>
+        <p:txBody>
+          <a:bodyPr/>
+          <a:lstStyle/>
+          <a:p>
+            <a:r>
+              <a:t>Vendor-neutral PRIMER — no AWS yet. Establish two ideas: what a relational DB is, and that</a:t>
+            </a:r>
+          </a:p>
+          <a:p>
+            <a:r>
+              <a:t>someone always has to operate it. This is the hinge the managed-vs-self-hosted teach turns on.</a:t>
+            </a:r>
+          </a:p>
+          <a:p>
+            <a:r>
+              <a:t>• A relational database stores STRUCTURED data in tables, queried with SQL — Ledgerline's</a:t>
+            </a:r>
+          </a:p>
+          <a:p>
+            <a:r>
+              <a:t>  accounts, ledgers and transactions are exactly this shape.</a:t>
+            </a:r>
+          </a:p>
+          <a:p>
+            <a:r>
+              <a:t>• The operations reality (walk it slowly): install + patch the OS and the DB engine, take and</a:t>
+            </a:r>
+          </a:p>
+          <a:p>
+            <a:r>
+              <a:t>  test backups, secure it, scale it. That work never goes away — the only question is WHO does it.</a:t>
+            </a:r>
+          </a:p>
+          <a:p>
+            <a:r>
+              <a:t>• The split (accent-bold): self-hosted = YOU do all of it (e.g. on an EC2 instance); managed =</a:t>
+            </a:r>
+          </a:p>
+          <a:p>
+            <a:r>
+              <a:t>  the cloud provider does it. Plant this now; RDS is the payoff two slides on.</a:t>
+            </a:r>
+          </a:p>
+          <a:p>
+            <a:r>
+              <a:t>Misconception to pre-empt: "the cloud means no database admin at all." No — managed shifts the</a:t>
+            </a:r>
+          </a:p>
+          <a:p>
+            <a:r>
+              <a:t>OS/engine/backup toil to AWS, but schema, data and query optimisation stay yours.</a:t>
+            </a:r>
+          </a:p>
+          <a:p>
+            <a:r>
+              <a:t>Question to pose: "If Ledgerline's database lived on one EC2 server, whose job is the 2am patch and</a:t>
+            </a:r>
+          </a:p>
+          <a:p>
+            <a:r>
+              <a:t>the nightly backup?" (yours — the argument for managed).</a:t>
+            </a:r>
+          </a:p>
+          <a:p>
+            <a:r>
+              <a:t>UoC/AT tie: ICTCLD401 KE 6 (relational; self-hosted vs managed vs cloud-native) — the primer the</a:t>
+            </a:r>
+          </a:p>
+          <a:p>
+            <a:r>
+              <a:t>PC 2.5 build rests on.</a:t>
+            </a:r>
+          </a:p>
+        </p:txBody>
+      </p:sp>
+      <p:sp>
+        <p:nvSpPr>
+          <p:cNvPr id="4" name="Slide Number Placeholder 3"/>
+          <p:cNvSpPr>
+            <a:spLocks noGrp="1"/>
+          </p:cNvSpPr>
+          <p:nvPr>
+            <p:ph type="sldNum" idx="5" sz="quarter"/>
+          </p:nvPr>
+        </p:nvSpPr>
+        <p:spPr/>
+      </p:sp>
+    </p:spTree>
+  </p:cSld>
+  <p:clrMapOvr>
+    <a:masterClrMapping/>
+  </p:clrMapOvr>
+</p:notes>
+</file>
+
+<file path=ppt/notesSlides/notesSlide3.xml><?xml version="1.0" encoding="utf-8"?>
+<p:notes xmlns:a="http://schemas.openxmlformats.org/drawingml/2006/main" xmlns:p="http://schemas.openxmlformats.org/presentationml/2006/main" xmlns:r="http://schemas.openxmlformats.org/officeDocument/2006/relationships">
+  <p:cSld>
+    <p:spTree>
+      <p:nvGrpSpPr>
+        <p:cNvPr id="1" name=""/>
+        <p:cNvGrpSpPr/>
+        <p:nvPr/>
+      </p:nvGrpSpPr>
+      <p:grpSpPr>
+        <a:xfrm>
+          <a:off x="0" y="0"/>
+          <a:ext cx="0" cy="0"/>
+          <a:chOff x="0" y="0"/>
+          <a:chExt cx="0" cy="0"/>
+        </a:xfrm>
+      </p:grpSpPr>
+      <p:sp>
+        <p:nvSpPr>
+          <p:cNvPr id="2" name="Slide Image Placeholder 1"/>
+          <p:cNvSpPr>
+            <a:spLocks noGrp="1"/>
+          </p:cNvSpPr>
+          <p:nvPr>
+            <p:ph type="sldImg" idx="2"/>
+          </p:nvPr>
+        </p:nvSpPr>
+        <p:spPr/>
+      </p:sp>
+      <p:sp>
+        <p:nvSpPr>
+          <p:cNvPr id="3" name="Notes Placeholder 2"/>
+          <p:cNvSpPr>
+            <a:spLocks noGrp="1"/>
+          </p:cNvSpPr>
+          <p:nvPr>
+            <p:ph type="body" idx="3" sz="quarter"/>
+          </p:nvPr>
+        </p:nvSpPr>
+        <p:spPr/>
+        <p:txBody>
+          <a:bodyPr/>
+          <a:lstStyle/>
+          <a:p>
+            <a:r>
+              <a:t>The AWS-context teach for the primer — make the trade-off concrete with EC2 vs RDS.</a:t>
+            </a:r>
+          </a:p>
+          <a:p>
+            <a:r>
+              <a:t>• Run it yourself on EC2: full control of engine and OS — but you own ALL the admin work (patching,</a:t>
+            </a:r>
+          </a:p>
+          <a:p>
+            <a:r>
+              <a:t>  backups, scaling, availability). Control has a labour cost.</a:t>
+            </a:r>
+          </a:p>
+          <a:p>
+            <a:r>
+              <a:t>• Amazon RDS (accent-bold) is a MANAGED service: AWS handles OS/DB install + patching, automated</a:t>
+            </a:r>
+          </a:p>
+          <a:p>
+            <a:r>
+              <a:t>  backups, scaling and availability. The toil from the last slide is offloaded.</a:t>
+            </a:r>
+          </a:p>
+          <a:p>
+            <a:r>
+              <a:t>• Be precise about the line: you KEEP application optimisation and your data — managed isn't</a:t>
+            </a:r>
+          </a:p>
+          <a:p>
+            <a:r>
+              <a:t>  "hands off everything," it's "hands off the undifferentiated ops."</a:t>
+            </a:r>
+          </a:p>
+          <a:p>
+            <a:r>
+              <a:t>• The trade-off in one line: control vs effort — choose managed UNLESS you need engine-level</a:t>
+            </a:r>
+          </a:p>
+          <a:p>
+            <a:r>
+              <a:t>  control. For a small RTO with thin cloud skills, managed is the obvious call.</a:t>
+            </a:r>
+          </a:p>
+          <a:p>
+            <a:r>
+              <a:t>Misconception to pre-empt: "managed = less capable / a toy database." It's the same SQL Server</a:t>
+            </a:r>
+          </a:p>
+          <a:p>
+            <a:r>
+              <a:t>engine; you're paying AWS to run the plumbing, not getting a lesser product.</a:t>
+            </a:r>
+          </a:p>
+          <a:p>
+            <a:r>
+              <a:t>Question to pose: "What would make YAT choose self-hosted on EC2 instead — and does Ledgerline</a:t>
+            </a:r>
+          </a:p>
+          <a:p>
+            <a:r>
+              <a:t>need any of that?" (engine-level control; it doesn't — so RDS).</a:t>
+            </a:r>
+          </a:p>
+          <a:p>
+            <a:r>
+              <a:t>UoC/AT tie: ICTCLD401 PC 2.5 + KE 6; this is the reasoning a student writes into AT2 §4.7.</a:t>
+            </a:r>
+          </a:p>
+        </p:txBody>
+      </p:sp>
+      <p:sp>
+        <p:nvSpPr>
+          <p:cNvPr id="4" name="Slide Number Placeholder 3"/>
+          <p:cNvSpPr>
+            <a:spLocks noGrp="1"/>
+          </p:cNvSpPr>
+          <p:nvPr>
+            <p:ph type="sldNum" idx="5" sz="quarter"/>
+          </p:nvPr>
+        </p:nvSpPr>
+        <p:spPr/>
+      </p:sp>
+    </p:spTree>
+  </p:cSld>
+  <p:clrMapOvr>
+    <a:masterClrMapping/>
+  </p:clrMapOvr>
+</p:notes>
+</file>
+
+<file path=ppt/notesSlides/notesSlide4.xml><?xml version="1.0" encoding="utf-8"?>
+<p:notes xmlns:a="http://schemas.openxmlformats.org/drawingml/2006/main" xmlns:p="http://schemas.openxmlformats.org/presentationml/2006/main" xmlns:r="http://schemas.openxmlformats.org/officeDocument/2006/relationships">
+  <p:cSld>
+    <p:spTree>
+      <p:nvGrpSpPr>
+        <p:cNvPr id="1" name=""/>
+        <p:cNvGrpSpPr/>
+        <p:nvPr/>
+      </p:nvGrpSpPr>
+      <p:grpSpPr>
+        <a:xfrm>
+          <a:off x="0" y="0"/>
+          <a:ext cx="0" cy="0"/>
+          <a:chOff x="0" y="0"/>
+          <a:chExt cx="0" cy="0"/>
+        </a:xfrm>
+      </p:grpSpPr>
+      <p:sp>
+        <p:nvSpPr>
+          <p:cNvPr id="2" name="Slide Image Placeholder 1"/>
+          <p:cNvSpPr>
+            <a:spLocks noGrp="1"/>
+          </p:cNvSpPr>
+          <p:nvPr>
+            <p:ph type="sldImg" idx="2"/>
+          </p:nvPr>
+        </p:nvSpPr>
+        <p:spPr/>
+      </p:sp>
+      <p:sp>
+        <p:nvSpPr>
+          <p:cNvPr id="3" name="Notes Placeholder 2"/>
+          <p:cNvSpPr>
+            <a:spLocks noGrp="1"/>
+          </p:cNvSpPr>
+          <p:nvPr>
+            <p:ph type="body" idx="3" sz="quarter"/>
+          </p:nvPr>
+        </p:nvSpPr>
+        <p:spPr/>
+        <p:txBody>
+          <a:bodyPr/>
+          <a:lstStyle/>
+          <a:p>
+            <a:r>
+              <a:t>Anchor the service — the concrete anatomy students must be able to name and configure.</a:t>
+            </a:r>
+          </a:p>
+          <a:p>
+            <a:r>
+              <a:t>• RDS sets up and OPERATES a relational database in the cloud; engines include Microsoft SQL</a:t>
+            </a:r>
+          </a:p>
+          <a:p>
+            <a:r>
+              <a:t>  Server (Ledgerline's engine — preserved, not migrated to something new).</a:t>
+            </a:r>
+          </a:p>
+          <a:p>
+            <a:r>
+              <a:t>• A DB instance has two dials: an instance CLASS (CPU/memory/network) and STORAGE (gp3 SSD or</a:t>
+            </a:r>
+          </a:p>
+          <a:p>
+            <a:r>
+              <a:t>  provisioned IOPS). Same mental model as sizing an EC2 instance in 8a.</a:t>
+            </a:r>
+          </a:p>
+          <a:p>
+            <a:r>
+              <a:t>• It runs INSIDE your VPC (not on the public internet); automated backups give point-in-time</a:t>
+            </a:r>
+          </a:p>
+          <a:p>
+            <a:r>
+              <a:t>  restore; encryption at rest is available. Tie each back to the network they built in Topic 7.</a:t>
+            </a:r>
+          </a:p>
+          <a:p>
+            <a:r>
+              <a:t>• Multi-AZ (accent-bold) gives a standby in another AZ for high availability — NAME it, then park</a:t>
+            </a:r>
+          </a:p>
+          <a:p>
+            <a:r>
+              <a:t>  it: it's deferred to AT3. Baseline here is single-AZ.</a:t>
+            </a:r>
+          </a:p>
+          <a:p>
+            <a:r>
+              <a:t>Misconception to pre-empt: "RDS is public / lives outside my network like a SaaS." No — it sits in</a:t>
+            </a:r>
+          </a:p>
+          <a:p>
+            <a:r>
+              <a:t>your private subnet, reachable only from where you allow.</a:t>
+            </a:r>
+          </a:p>
+          <a:p>
+            <a:r>
+              <a:t>Question to pose: "Two dials size an RDS instance — which two, and which one did we decide in C2?"</a:t>
+            </a:r>
+          </a:p>
+          <a:p>
+            <a:r>
+              <a:t>(class + storage; class = C2 decision).</a:t>
+            </a:r>
+          </a:p>
+          <a:p>
+            <a:r>
+              <a:t>UoC/AT tie: ICTCLD401 PC 2.5 + KE 5 (backups/lifecycle); the depth ceiling is deliberate —</a:t>
+            </a:r>
+          </a:p>
+          <a:p>
+            <a:r>
+              <a:t>Multi-AZ/HA is AT3, not here.</a:t>
+            </a:r>
+          </a:p>
+        </p:txBody>
+      </p:sp>
+      <p:sp>
+        <p:nvSpPr>
+          <p:cNvPr id="4" name="Slide Number Placeholder 3"/>
+          <p:cNvSpPr>
+            <a:spLocks noGrp="1"/>
+          </p:cNvSpPr>
+          <p:nvPr>
+            <p:ph type="sldNum" idx="5" sz="quarter"/>
+          </p:nvPr>
+        </p:nvSpPr>
+        <p:spPr/>
+      </p:sp>
+    </p:spTree>
+  </p:cSld>
+  <p:clrMapOvr>
+    <a:masterClrMapping/>
+  </p:clrMapOvr>
+</p:notes>
+</file>
+
+<file path=ppt/notesSlides/notesSlide5.xml><?xml version="1.0" encoding="utf-8"?>
+<p:notes xmlns:a="http://schemas.openxmlformats.org/drawingml/2006/main" xmlns:p="http://schemas.openxmlformats.org/presentationml/2006/main" xmlns:r="http://schemas.openxmlformats.org/officeDocument/2006/relationships">
+  <p:cSld>
+    <p:spTree>
+      <p:nvGrpSpPr>
+        <p:cNvPr id="1" name=""/>
+        <p:cNvGrpSpPr/>
+        <p:nvPr/>
+      </p:nvGrpSpPr>
+      <p:grpSpPr>
+        <a:xfrm>
+          <a:off x="0" y="0"/>
+          <a:ext cx="0" cy="0"/>
+          <a:chOff x="0" y="0"/>
+          <a:chExt cx="0" cy="0"/>
+        </a:xfrm>
+      </p:grpSpPr>
+      <p:sp>
+        <p:nvSpPr>
+          <p:cNvPr id="2" name="Slide Image Placeholder 1"/>
+          <p:cNvSpPr>
+            <a:spLocks noGrp="1"/>
+          </p:cNvSpPr>
+          <p:nvPr>
+            <p:ph type="sldImg" idx="2"/>
+          </p:nvPr>
+        </p:nvSpPr>
+        <p:spPr/>
+      </p:sp>
+      <p:sp>
+        <p:nvSpPr>
+          <p:cNvPr id="3" name="Notes Placeholder 2"/>
+          <p:cNvSpPr>
+            <a:spLocks noGrp="1"/>
+          </p:cNvSpPr>
+          <p:nvPr>
+            <p:ph type="body" idx="3" sz="quarter"/>
+          </p:nvPr>
+        </p:nvSpPr>
+        <p:spPr/>
+        <p:txBody>
+          <a:bodyPr/>
+          <a:lstStyle/>
+          <a:p>
+            <a:r>
+              <a:t>The design's specifics — this is the exact instance students provision, straight from the</a:t>
+            </a:r>
+          </a:p>
+          <a:p>
+            <a:r>
+              <a:t>supplied Solution Design. Read it as a spec, not a lecture.</a:t>
+            </a:r>
+          </a:p>
+          <a:p>
+            <a:r>
+              <a:t>• RDS for SQL Server, STANDARD edition — chosen to preserve the existing engine + data; not a</a:t>
+            </a:r>
+          </a:p>
+          <a:p>
+            <a:r>
+              <a:t>  re-platform.</a:t>
+            </a:r>
+          </a:p>
+          <a:p>
+            <a:r>
+              <a:t>• Instance class db.m6i.large (a C2 decision, implementer-set); gp3 storage ~22 GB + growth; in</a:t>
+            </a:r>
+          </a:p>
+          <a:p>
+            <a:r>
+              <a:t>  private-data-a, locked to sg-db, NOT public. Every one of those is a design mandate.</a:t>
+            </a:r>
+          </a:p>
+          <a:p>
+            <a:r>
+              <a:t>• Multi-AZ OFF at baseline; KMS encryption ON; automated backups + tx-log backups to RPO &lt;= 1 hour.</a:t>
+            </a:r>
+          </a:p>
+          <a:p>
+            <a:r>
+              <a:t>• The boundary that matters most (accent-bold): MTS provisions an EMPTY instance — schema and data</a:t>
+            </a:r>
+          </a:p>
+          <a:p>
+            <a:r>
+              <a:t>  migration are YAT ICT's responsibility. Students build the container, not the contents.</a:t>
+            </a:r>
+          </a:p>
+          <a:p>
+            <a:r>
+              <a:t>Misconception to pre-empt: "I need to load Ledgerline's data to finish." No — an empty, correctly-</a:t>
+            </a:r>
+          </a:p>
+          <a:p>
+            <a:r>
+              <a:t>configured instance is the deliverable; loading data is the customer's job and out of scope.</a:t>
+            </a:r>
+          </a:p>
+          <a:p>
+            <a:r>
+              <a:t>Question to pose: "Why does MTS hand over an empty database rather than migrate the data itself?"</a:t>
+            </a:r>
+          </a:p>
+          <a:p>
+            <a:r>
+              <a:t>(scope + data-custody — it's YAT's data and responsibility).</a:t>
+            </a:r>
+          </a:p>
+          <a:p>
+            <a:r>
+              <a:t>UoC/AT tie: ICTCLD401 PC 2.5; the settings here map one-to-one to AT2 §4.7 evidence.</a:t>
+            </a:r>
+          </a:p>
+        </p:txBody>
+      </p:sp>
+      <p:sp>
+        <p:nvSpPr>
+          <p:cNvPr id="4" name="Slide Number Placeholder 3"/>
+          <p:cNvSpPr>
+            <a:spLocks noGrp="1"/>
+          </p:cNvSpPr>
+          <p:nvPr>
+            <p:ph type="sldNum" idx="5" sz="quarter"/>
+          </p:nvPr>
+        </p:nvSpPr>
+        <p:spPr/>
+      </p:sp>
+    </p:spTree>
+  </p:cSld>
+  <p:clrMapOvr>
+    <a:masterClrMapping/>
+  </p:clrMapOvr>
+</p:notes>
+</file>
+
+<file path=ppt/notesSlides/notesSlide6.xml><?xml version="1.0" encoding="utf-8"?>
+<p:notes xmlns:a="http://schemas.openxmlformats.org/drawingml/2006/main" xmlns:p="http://schemas.openxmlformats.org/presentationml/2006/main" xmlns:r="http://schemas.openxmlformats.org/officeDocument/2006/relationships">
+  <p:cSld>
+    <p:spTree>
+      <p:nvGrpSpPr>
+        <p:cNvPr id="1" name=""/>
+        <p:cNvGrpSpPr/>
+        <p:nvPr/>
+      </p:nvGrpSpPr>
+      <p:grpSpPr>
+        <a:xfrm>
+          <a:off x="0" y="0"/>
+          <a:ext cx="0" cy="0"/>
+          <a:chOff x="0" y="0"/>
+          <a:chExt cx="0" cy="0"/>
+        </a:xfrm>
+      </p:grpSpPr>
+      <p:sp>
+        <p:nvSpPr>
+          <p:cNvPr id="2" name="Slide Image Placeholder 1"/>
+          <p:cNvSpPr>
+            <a:spLocks noGrp="1"/>
+          </p:cNvSpPr>
+          <p:nvPr>
+            <p:ph type="sldImg" idx="2"/>
+          </p:nvPr>
+        </p:nvSpPr>
+        <p:spPr/>
+      </p:sp>
+      <p:sp>
+        <p:nvSpPr>
+          <p:cNvPr id="3" name="Notes Placeholder 2"/>
+          <p:cNvSpPr>
+            <a:spLocks noGrp="1"/>
+          </p:cNvSpPr>
+          <p:nvPr>
+            <p:ph type="body" idx="3" sz="quarter"/>
+          </p:nvPr>
+        </p:nvSpPr>
+        <p:spPr/>
+        <p:txBody>
+          <a:bodyPr/>
+          <a:lstStyle/>
+          <a:p>
+            <a:r>
+              <a:t>WHERE TO FIND THE RECORDED DEMO: AWS Academy Cloud Foundations -&gt; Module 08 (Databases) -&gt; slide 22,</a:t>
+            </a:r>
+          </a:p>
+          <a:p>
+            <a:r>
+              <a:t>"Recorded demo: Amazon RDS console"; pair it with AWS Academy Cloud Architecting -&gt; Module 06 -&gt;</a:t>
+            </a:r>
+          </a:p>
+          <a:p>
+            <a:r>
+              <a:t>slide 37, "Demo: Amazon RDS Automated Backup &amp; Read Replicas" for the backup/RPO step. Both live in</a:t>
+            </a:r>
+          </a:p>
+          <a:p>
+            <a:r>
+              <a:t>original-materials/AWS-Instructor Presentations/… — instructor-facing, screen in class, don't</a:t>
+            </a:r>
+          </a:p>
+          <a:p>
+            <a:r>
+              <a:t>distribute. Preview and queue both before class.</a:t>
+            </a:r>
+          </a:p>
+          <a:p/>
+          <a:p>
+            <a:r>
+              <a:t>WHAT TO DEMONSTRATE (follow the recorded demos, then relate each step to OUR build):</a:t>
+            </a:r>
+          </a:p>
+          <a:p>
+            <a:r>
+              <a:t>1. Create a DB subnet group and the database security group (sg-db).</a:t>
+            </a:r>
+          </a:p>
+          <a:p>
+            <a:r>
+              <a:t>2. Launch an RDS DB instance — choose engine (SQL Server Standard), instance class, storage and</a:t>
+            </a:r>
+          </a:p>
+          <a:p>
+            <a:r>
+              <a:t>   backup settings.</a:t>
+            </a:r>
+          </a:p>
+          <a:p>
+            <a:r>
+              <a:t>3. Connect from the application tier to confirm the database is reachable.</a:t>
+            </a:r>
+          </a:p>
+          <a:p/>
+          <a:p>
+            <a:r>
+              <a:t>WHAT TO EMPHASISE:</a:t>
+            </a:r>
+          </a:p>
+          <a:p>
+            <a:r>
+              <a:t>• The subnet group is what pins RDS into private-data-a — show it lands in the private subnet, not</a:t>
+            </a:r>
+          </a:p>
+          <a:p>
+            <a:r>
+              <a:t>  public. This is the network discipline from Topic 7 paying off.</a:t>
+            </a:r>
+          </a:p>
+          <a:p>
+            <a:r>
+              <a:t>• Turn ON automated backups + KMS encryption during creation; narrate RPO &lt;= 1 hour (use the ACA M06</a:t>
+            </a:r>
+          </a:p>
+          <a:p>
+            <a:r>
+              <a:t>  backup demo here). Leave Multi-AZ OFF — say out loud that HA is AT3.</a:t>
+            </a:r>
+          </a:p>
+          <a:p>
+            <a:r>
+              <a:t>• Show the app-tier -&gt; DB connectivity test; this completes the PC 2.6 test begun in Topic 7.</a:t>
+            </a:r>
+          </a:p>
+          <a:p>
+            <a:r>
+              <a:t>• Narrate the evidence capture — instance, network/SG, backup + encryption settings — model it.</a:t>
+            </a:r>
+          </a:p>
+          <a:p/>
+          <a:p>
+            <a:r>
+              <a:t>PREP: clean lab, the supplied Solution Design open for the exact settings, both demos queued.</a:t>
+            </a:r>
+          </a:p>
+          <a:p>
+            <a:r>
+              <a:t>~8-10 min to screen + narrate before the activity.</a:t>
+            </a:r>
+          </a:p>
+        </p:txBody>
+      </p:sp>
+      <p:sp>
+        <p:nvSpPr>
+          <p:cNvPr id="4" name="Slide Number Placeholder 3"/>
+          <p:cNvSpPr>
+            <a:spLocks noGrp="1"/>
+          </p:cNvSpPr>
+          <p:nvPr>
+            <p:ph type="sldNum" idx="5" sz="quarter"/>
+          </p:nvPr>
+        </p:nvSpPr>
+        <p:spPr/>
+      </p:sp>
+    </p:spTree>
+  </p:cSld>
+  <p:clrMapOvr>
+    <a:masterClrMapping/>
+  </p:clrMapOvr>
+</p:notes>
+</file>
+
+<file path=ppt/notesSlides/notesSlide7.xml><?xml version="1.0" encoding="utf-8"?>
+<p:notes xmlns:a="http://schemas.openxmlformats.org/drawingml/2006/main" xmlns:p="http://schemas.openxmlformats.org/presentationml/2006/main" xmlns:r="http://schemas.openxmlformats.org/officeDocument/2006/relationships">
+  <p:cSld>
+    <p:spTree>
+      <p:nvGrpSpPr>
+        <p:cNvPr id="1" name=""/>
+        <p:cNvGrpSpPr/>
+        <p:nvPr/>
+      </p:nvGrpSpPr>
+      <p:grpSpPr>
+        <a:xfrm>
+          <a:off x="0" y="0"/>
+          <a:ext cx="0" cy="0"/>
+          <a:chOff x="0" y="0"/>
+          <a:chExt cx="0" cy="0"/>
+        </a:xfrm>
+      </p:grpSpPr>
+      <p:sp>
+        <p:nvSpPr>
+          <p:cNvPr id="2" name="Slide Image Placeholder 1"/>
+          <p:cNvSpPr>
+            <a:spLocks noGrp="1"/>
+          </p:cNvSpPr>
+          <p:nvPr>
+            <p:ph type="sldImg" idx="2"/>
+          </p:nvPr>
+        </p:nvSpPr>
+        <p:spPr/>
+      </p:sp>
+      <p:sp>
+        <p:nvSpPr>
+          <p:cNvPr id="3" name="Notes Placeholder 2"/>
+          <p:cNvSpPr>
+            <a:spLocks noGrp="1"/>
+          </p:cNvSpPr>
+          <p:nvPr>
+            <p:ph type="body" idx="3" sz="quarter"/>
+          </p:nvPr>
+        </p:nvSpPr>
+        <p:spPr/>
+        <p:txBody>
+          <a:bodyPr/>
+          <a:lstStyle/>
+          <a:p>
+            <a:r>
+              <a:t>Facilitation — the C3 practice build. They provision the database to the design and complete the</a:t>
+            </a:r>
+          </a:p>
+          <a:p>
+            <a:r>
+              <a:t>connectivity test. You circulate; they build and evidence.</a:t>
+            </a:r>
+          </a:p>
+          <a:p>
+            <a:r>
+              <a:t>Tell students, in these words: "Open the lab and the Accounting Baseline Solution Design. Provision</a:t>
+            </a:r>
+          </a:p>
+          <a:p>
+            <a:r>
+              <a:t>Ledgerline's database exactly to the design — RDS for SQL Server in the private data subnet — then</a:t>
+            </a:r>
+          </a:p>
+          <a:p>
+            <a:r>
+              <a:t>test the app can reach it. Capture evidence as you go."</a:t>
+            </a:r>
+          </a:p>
+          <a:p>
+            <a:r>
+              <a:t>The task, step by step (put on the board / read out):</a:t>
+            </a:r>
+          </a:p>
+          <a:p>
+            <a:r>
+              <a:t>1. Provision RDS for SQL Server (class + storage per the design), in private-data-a with sg-db, NOT</a:t>
+            </a:r>
+          </a:p>
+          <a:p>
+            <a:r>
+              <a:t>   public.</a:t>
+            </a:r>
+          </a:p>
+          <a:p>
+            <a:r>
+              <a:t>2. Enable automated backups + KMS encryption; leave Multi-AZ OFF (baseline).</a:t>
+            </a:r>
+          </a:p>
+          <a:p>
+            <a:r>
+              <a:t>3. Test app -&gt; database connectivity (this completes the Topic 7 connectivity test) and fix any</a:t>
+            </a:r>
+          </a:p>
+          <a:p>
+            <a:r>
+              <a:t>   errors.</a:t>
+            </a:r>
+          </a:p>
+          <a:p>
+            <a:r>
+              <a:t>4. Capture evidence — the instance, its network/SG, backup + encryption settings.</a:t>
+            </a:r>
+          </a:p>
+          <a:p>
+            <a:r>
+              <a:t>MUST PRODUCE (AT2 evidence): screenshots of the RDS instance, its subnet/SG placement, and the</a:t>
+            </a:r>
+          </a:p>
+          <a:p>
+            <a:r>
+              <a:t>backup + encryption settings, plus a successful app-&gt;db connectivity check.</a:t>
+            </a:r>
+          </a:p>
+          <a:p>
+            <a:r>
+              <a:t>TIMING: ~20 min. Where they get stuck: (a) putting RDS in the wrong subnet / making it public —</a:t>
+            </a:r>
+          </a:p>
+          <a:p>
+            <a:r>
+              <a:t>send them back to the subnet group; (b) SG rules blocking the app-&gt;db test — check sg-db allows</a:t>
+            </a:r>
+          </a:p>
+          <a:p>
+            <a:r>
+              <a:t>the app SG on the DB port.</a:t>
+            </a:r>
+          </a:p>
+          <a:p>
+            <a:r>
+              <a:t>SHARE-BACK: ask one student to show their instance is private + encrypted with Multi-AZ off; confirm</a:t>
+            </a:r>
+          </a:p>
+          <a:p>
+            <a:r>
+              <a:t>nobody flipped HA on.</a:t>
+            </a:r>
+          </a:p>
+          <a:p>
+            <a:r>
+              <a:t>No-leakage note: this practice uses the Accounting / Ledgerline system; the ASSESSED build is a</a:t>
+            </a:r>
+          </a:p>
+          <a:p>
+            <a:r>
+              <a:t>different system on the LMS — comparable, not identical.</a:t>
+            </a:r>
+          </a:p>
+        </p:txBody>
+      </p:sp>
+      <p:sp>
+        <p:nvSpPr>
+          <p:cNvPr id="4" name="Slide Number Placeholder 3"/>
+          <p:cNvSpPr>
+            <a:spLocks noGrp="1"/>
+          </p:cNvSpPr>
+          <p:nvPr>
+            <p:ph type="sldNum" idx="5" sz="quarter"/>
+          </p:nvPr>
+        </p:nvSpPr>
+        <p:spPr/>
+      </p:sp>
+    </p:spTree>
+  </p:cSld>
+  <p:clrMapOvr>
+    <a:masterClrMapping/>
+  </p:clrMapOvr>
+</p:notes>
+</file>
+
+<file path=ppt/notesSlides/notesSlide8.xml><?xml version="1.0" encoding="utf-8"?>
+<p:notes xmlns:a="http://schemas.openxmlformats.org/drawingml/2006/main" xmlns:p="http://schemas.openxmlformats.org/presentationml/2006/main" xmlns:r="http://schemas.openxmlformats.org/officeDocument/2006/relationships">
+  <p:cSld>
+    <p:spTree>
+      <p:nvGrpSpPr>
+        <p:cNvPr id="1" name=""/>
+        <p:cNvGrpSpPr/>
+        <p:nvPr/>
+      </p:nvGrpSpPr>
+      <p:grpSpPr>
+        <a:xfrm>
+          <a:off x="0" y="0"/>
+          <a:ext cx="0" cy="0"/>
+          <a:chOff x="0" y="0"/>
+          <a:chExt cx="0" cy="0"/>
+        </a:xfrm>
+      </p:grpSpPr>
+      <p:sp>
+        <p:nvSpPr>
+          <p:cNvPr id="2" name="Slide Image Placeholder 1"/>
+          <p:cNvSpPr>
+            <a:spLocks noGrp="1"/>
+          </p:cNvSpPr>
+          <p:nvPr>
+            <p:ph type="sldImg" idx="2"/>
+          </p:nvPr>
+        </p:nvSpPr>
+        <p:spPr/>
+      </p:sp>
+      <p:sp>
+        <p:nvSpPr>
+          <p:cNvPr id="3" name="Notes Placeholder 2"/>
+          <p:cNvSpPr>
+            <a:spLocks noGrp="1"/>
+          </p:cNvSpPr>
+          <p:nvPr>
+            <p:ph type="body" idx="3" sz="quarter"/>
+          </p:nvPr>
+        </p:nvSpPr>
+        <p:spPr/>
+        <p:txBody>
+          <a:bodyPr/>
+          <a:lstStyle/>
+          <a:p>
+            <a:r>
+              <a:t>Vendor-neutral PRIMER opening the storage section — the block/object/archive distinction is the</a:t>
+            </a:r>
+          </a:p>
+          <a:p>
+            <a:r>
+              <a:t>examinable point, so make it stick before any AWS names.</a:t>
+            </a:r>
+          </a:p>
+          <a:p>
+            <a:r>
+              <a:t>• Block storage = a virtual DISK attached to one instance (EBS) — you can change one block of a</a:t>
+            </a:r>
+          </a:p>
+          <a:p>
+            <a:r>
+              <a:t>  file in place. This is the EC2 disk from 8a; students already met it.</a:t>
+            </a:r>
+          </a:p>
+          <a:p>
+            <a:r>
+              <a:t>• Object storage (accent-bold) = whole files (OBJECTS) + metadata, reached by API, virtually</a:t>
+            </a:r>
+          </a:p>
+          <a:p>
+            <a:r>
+              <a:t>  unlimited (S3). You replace a whole object; no OS mounts it like a drive.</a:t>
+            </a:r>
+          </a:p>
+          <a:p>
+            <a:r>
+              <a:t>• Archive storage = very cheap, SLOW to retrieve, for long-term retention (Glacier). Cold storage.</a:t>
+            </a:r>
+          </a:p>
+          <a:p>
+            <a:r>
+              <a:t>• The teaching line: match the storage to the job — performance AND cost both depend on the choice.</a:t>
+            </a:r>
+          </a:p>
+          <a:p>
+            <a:r>
+              <a:t>Misconception to pre-empt: "S3 is just a hard drive in the cloud." No — it's object storage reached</a:t>
+            </a:r>
+          </a:p>
+          <a:p>
+            <a:r>
+              <a:t>by API; you don't mount it like a block disk. This block-vs-object line is the whole slide.</a:t>
+            </a:r>
+          </a:p>
+          <a:p>
+            <a:r>
+              <a:t>Question to pose: "Ledgerline's scanned invoices — block, object or archive, and why?" (object for</a:t>
+            </a:r>
+          </a:p>
+          <a:p>
+            <a:r>
+              <a:t>the live docs; archive/Glacier once they age into the 7-year hold).</a:t>
+            </a:r>
+          </a:p>
+          <a:p>
+            <a:r>
+              <a:t>UoC/AT tie: ICTCLD401 KE 6 (storage options — block/object/archive); EBS = block (C1), S3/Glacier</a:t>
+            </a:r>
+          </a:p>
+          <a:p>
+            <a:r>
+              <a:t>= object/archive (C4). The distinction is explicit by design.</a:t>
+            </a:r>
+          </a:p>
+        </p:txBody>
+      </p:sp>
+      <p:sp>
+        <p:nvSpPr>
+          <p:cNvPr id="4" name="Slide Number Placeholder 3"/>
+          <p:cNvSpPr>
+            <a:spLocks noGrp="1"/>
+          </p:cNvSpPr>
+          <p:nvPr>
+            <p:ph type="sldNum" idx="5" sz="quarter"/>
+          </p:nvPr>
+        </p:nvSpPr>
+        <p:spPr/>
+      </p:sp>
+    </p:spTree>
+  </p:cSld>
+  <p:clrMapOvr>
+    <a:masterClrMapping/>
+  </p:clrMapOvr>
+</p:notes>
+</file>
+
+<file path=ppt/notesSlides/notesSlide9.xml><?xml version="1.0" encoding="utf-8"?>
+<p:notes xmlns:a="http://schemas.openxmlformats.org/drawingml/2006/main" xmlns:p="http://schemas.openxmlformats.org/presentationml/2006/main" xmlns:r="http://schemas.openxmlformats.org/officeDocument/2006/relationships">
+  <p:cSld>
+    <p:spTree>
+      <p:nvGrpSpPr>
+        <p:cNvPr id="1" name=""/>
+        <p:cNvGrpSpPr/>
+        <p:nvPr/>
+      </p:nvGrpSpPr>
+      <p:grpSpPr>
+        <a:xfrm>
+          <a:off x="0" y="0"/>
+          <a:ext cx="0" cy="0"/>
+          <a:chOff x="0" y="0"/>
+          <a:chExt cx="0" cy="0"/>
+        </a:xfrm>
+      </p:grpSpPr>
+      <p:sp>
+        <p:nvSpPr>
+          <p:cNvPr id="2" name="Slide Image Placeholder 1"/>
+          <p:cNvSpPr>
+            <a:spLocks noGrp="1"/>
+          </p:cNvSpPr>
+          <p:nvPr>
+            <p:ph type="sldImg" idx="2"/>
+          </p:nvPr>
+        </p:nvSpPr>
+        <p:spPr/>
+      </p:sp>
+      <p:sp>
+        <p:nvSpPr>
+          <p:cNvPr id="3" name="Notes Placeholder 2"/>
+          <p:cNvSpPr>
+            <a:spLocks noGrp="1"/>
+          </p:cNvSpPr>
+          <p:nvPr>
+            <p:ph type="body" idx="3" sz="quarter"/>
+          </p:nvPr>
+        </p:nvSpPr>
+        <p:spPr/>
+        <p:txBody>
+          <a:bodyPr/>
+          <a:lstStyle/>
+          <a:p>
+            <a:r>
+              <a:t>Anchor the service — the properties that matter for a correct, secure bucket.</a:t>
+            </a:r>
+          </a:p>
+          <a:p>
+            <a:r>
+              <a:t>• S3 stores OBJECTS in BUCKETS; virtually unlimited; designed for 11 nines of durability (say it</a:t>
+            </a:r>
+          </a:p>
+          <a:p>
+            <a:r>
+              <a:t>  plainly — you effectively don't lose objects).</a:t>
+            </a:r>
+          </a:p>
+          <a:p>
+            <a:r>
+              <a:t>• Buckets are REGION-scoped but their NAME is globally unique; access is granular (IAM + bucket</a:t>
+            </a:r>
+          </a:p>
+          <a:p>
+            <a:r>
+              <a:t>  settings). The name being global trips students up — flag it.</a:t>
+            </a:r>
+          </a:p>
+          <a:p>
+            <a:r>
+              <a:t>• The three protections (accent-bold): BLOCK public access, ENCRYPT (SSE), and enable VERSIONING.</a:t>
+            </a:r>
+          </a:p>
+          <a:p>
+            <a:r>
+              <a:t>  For a client holding financial records these aren't optional niceties — they're the baseline.</a:t>
+            </a:r>
+          </a:p>
+          <a:p>
+            <a:r>
+              <a:t>• Common uses: backups, application assets, document stores — exactly Ledgerline's scanned invoices</a:t>
+            </a:r>
+          </a:p>
+          <a:p>
+            <a:r>
+              <a:t>  and off-instance backups.</a:t>
+            </a:r>
+          </a:p>
+          <a:p>
+            <a:r>
+              <a:t>Misconception to pre-empt: "S3 buckets are public by default / someone could stumble on my files."</a:t>
+            </a:r>
+          </a:p>
+          <a:p>
+            <a:r>
+              <a:t>Modern default is private; the risk is a MIS-configuration that opens them — which is why "block</a:t>
+            </a:r>
+          </a:p>
+          <a:p>
+            <a:r>
+              <a:t>public access" is a deliberate, evidenced step.</a:t>
+            </a:r>
+          </a:p>
+          <a:p>
+            <a:r>
+              <a:t>Question to pose: "A bucket name is globally unique but the bucket lives in one Region — why does</a:t>
+            </a:r>
+          </a:p>
+          <a:p>
+            <a:r>
+              <a:t>that distinction matter for YAT's data residency?" (data sits in the Region; the name is just a</a:t>
+            </a:r>
+          </a:p>
+          <a:p>
+            <a:r>
+              <a:t>global label).</a:t>
+            </a:r>
+          </a:p>
+          <a:p>
+            <a:r>
+              <a:t>UoC/AT tie: ICTCLD401 KE 6 (object storage) + KE 5 (backups); the three protections are AT2 §4.8</a:t>
+            </a:r>
+          </a:p>
+          <a:p>
+            <a:r>
+              <a:t>evidence.</a:t>
+            </a:r>
+          </a:p>
+        </p:txBody>
+      </p:sp>
+      <p:sp>
+        <p:nvSpPr>
+          <p:cNvPr id="4" name="Slide Number Placeholder 3"/>
+          <p:cNvSpPr>
+            <a:spLocks noGrp="1"/>
+          </p:cNvSpPr>
+          <p:nvPr>
+            <p:ph type="sldNum" idx="5" sz="quarter"/>
+          </p:nvPr>
+        </p:nvSpPr>
+        <p:spPr/>
+      </p:sp>
+    </p:spTree>
+  </p:cSld>
+  <p:clrMapOvr>
+    <a:masterClrMapping/>
+  </p:clrMapOvr>
+</p:notes>
 </file>
 
 <file path=ppt/slideLayouts/slideLayout1.xml><?xml version="1.0" encoding="utf-8"?>
@@ -12217,4 +14473,324 @@
   </a:objectDefaults>
   <a:extraClrSchemeLst/>
 </a:theme>
+</file>
+
+<file path=ppt/theme/theme2.xml><?xml version="1.0" encoding="utf-8"?>
+<a:theme xmlns:a="http://schemas.openxmlformats.org/drawingml/2006/main" name="Office Theme">
+  <a:themeElements>
+    <a:clrScheme name="Office">
+      <a:dk1>
+        <a:sysClr val="windowText" lastClr="000000"/>
+      </a:dk1>
+      <a:lt1>
+        <a:sysClr val="window" lastClr="FFFFFF"/>
+      </a:lt1>
+      <a:dk2>
+        <a:srgbClr val="1F497D"/>
+      </a:dk2>
+      <a:lt2>
+        <a:srgbClr val="EEECE1"/>
+      </a:lt2>
+      <a:accent1>
+        <a:srgbClr val="4F81BD"/>
+      </a:accent1>
+      <a:accent2>
+        <a:srgbClr val="C0504D"/>
+      </a:accent2>
+      <a:accent3>
+        <a:srgbClr val="9BBB59"/>
+      </a:accent3>
+      <a:accent4>
+        <a:srgbClr val="8064A2"/>
+      </a:accent4>
+      <a:accent5>
+        <a:srgbClr val="4BACC6"/>
+      </a:accent5>
+      <a:accent6>
+        <a:srgbClr val="F79646"/>
+      </a:accent6>
+      <a:hlink>
+        <a:srgbClr val="0000FF"/>
+      </a:hlink>
+      <a:folHlink>
+        <a:srgbClr val="800080"/>
+      </a:folHlink>
+    </a:clrScheme>
+    <a:fontScheme name="Office">
+      <a:majorFont>
+        <a:latin typeface="Calibri"/>
+        <a:ea typeface=""/>
+        <a:cs typeface=""/>
+        <a:font script="Jpan" typeface="ＭＳ Ｐゴシック"/>
+        <a:font script="Hang" typeface="맑은 고딕"/>
+        <a:font script="Hans" typeface="宋体"/>
+        <a:font script="Hant" typeface="新細明體"/>
+        <a:font script="Arab" typeface="Times New Roman"/>
+        <a:font script="Hebr" typeface="Times New Roman"/>
+        <a:font script="Thai" typeface="Angsana New"/>
+        <a:font script="Ethi" typeface="Nyala"/>
+        <a:font script="Beng" typeface="Vrinda"/>
+        <a:font script="Gujr" typeface="Shruti"/>
+        <a:font script="Khmr" typeface="MoolBoran"/>
+        <a:font script="Knda" typeface="Tunga"/>
+        <a:font script="Guru" typeface="Raavi"/>
+        <a:font script="Cans" typeface="Euphemia"/>
+        <a:font script="Cher" typeface="Plantagenet Cherokee"/>
+        <a:font script="Yiii" typeface="Microsoft Yi Baiti"/>
+        <a:font script="Tibt" typeface="Microsoft Himalaya"/>
+        <a:font script="Thaa" typeface="MV Boli"/>
+        <a:font script="Deva" typeface="Mangal"/>
+        <a:font script="Telu" typeface="Gautami"/>
+        <a:font script="Taml" typeface="Latha"/>
+        <a:font script="Syrc" typeface="Estrangelo Edessa"/>
+        <a:font script="Orya" typeface="Kalinga"/>
+        <a:font script="Mlym" typeface="Kartika"/>
+        <a:font script="Laoo" typeface="DokChampa"/>
+        <a:font script="Sinh" typeface="Iskoola Pota"/>
+        <a:font script="Mong" typeface="Mongolian Baiti"/>
+        <a:font script="Viet" typeface="Times New Roman"/>
+        <a:font script="Uigh" typeface="Microsoft Uighur"/>
+        <a:font script="Geor" typeface="Sylfaen"/>
+      </a:majorFont>
+      <a:minorFont>
+        <a:latin typeface="Calibri"/>
+        <a:ea typeface=""/>
+        <a:cs typeface=""/>
+        <a:font script="Jpan" typeface="ＭＳ Ｐゴシック"/>
+        <a:font script="Hang" typeface="맑은 고딕"/>
+        <a:font script="Hans" typeface="宋体"/>
+        <a:font script="Hant" typeface="新細明體"/>
+        <a:font script="Arab" typeface="Arial"/>
+        <a:font script="Hebr" typeface="Arial"/>
+        <a:font script="Thai" typeface="Cordia New"/>
+        <a:font script="Ethi" typeface="Nyala"/>
+        <a:font script="Beng" typeface="Vrinda"/>
+        <a:font script="Gujr" typeface="Shruti"/>
+        <a:font script="Khmr" typeface="DaunPenh"/>
+        <a:font script="Knda" typeface="Tunga"/>
+        <a:font script="Guru" typeface="Raavi"/>
+        <a:font script="Cans" typeface="Euphemia"/>
+        <a:font script="Cher" typeface="Plantagenet Cherokee"/>
+        <a:font script="Yiii" typeface="Microsoft Yi Baiti"/>
+        <a:font script="Tibt" typeface="Microsoft Himalaya"/>
+        <a:font script="Thaa" typeface="MV Boli"/>
+        <a:font script="Deva" typeface="Mangal"/>
+        <a:font script="Telu" typeface="Gautami"/>
+        <a:font script="Taml" typeface="Latha"/>
+        <a:font script="Syrc" typeface="Estrangelo Edessa"/>
+        <a:font script="Orya" typeface="Kalinga"/>
+        <a:font script="Mlym" typeface="Kartika"/>
+        <a:font script="Laoo" typeface="DokChampa"/>
+        <a:font script="Sinh" typeface="Iskoola Pota"/>
+        <a:font script="Mong" typeface="Mongolian Baiti"/>
+        <a:font script="Viet" typeface="Arial"/>
+        <a:font script="Uigh" typeface="Microsoft Uighur"/>
+        <a:font script="Geor" typeface="Sylfaen"/>
+      </a:minorFont>
+    </a:fontScheme>
+    <a:fmtScheme name="Office">
+      <a:fillStyleLst>
+        <a:solidFill>
+          <a:schemeClr val="phClr"/>
+        </a:solidFill>
+        <a:gradFill rotWithShape="1">
+          <a:gsLst>
+            <a:gs pos="0">
+              <a:schemeClr val="phClr">
+                <a:tint val="50000"/>
+                <a:satMod val="300000"/>
+              </a:schemeClr>
+            </a:gs>
+            <a:gs pos="35000">
+              <a:schemeClr val="phClr">
+                <a:tint val="37000"/>
+                <a:satMod val="300000"/>
+              </a:schemeClr>
+            </a:gs>
+            <a:gs pos="100000">
+              <a:schemeClr val="phClr">
+                <a:tint val="15000"/>
+                <a:satMod val="350000"/>
+              </a:schemeClr>
+            </a:gs>
+          </a:gsLst>
+          <a:lin ang="16200000" scaled="1"/>
+        </a:gradFill>
+        <a:gradFill rotWithShape="1">
+          <a:gsLst>
+            <a:gs pos="0">
+              <a:schemeClr val="phClr">
+                <a:tint val="100000"/>
+                <a:shade val="100000"/>
+                <a:satMod val="130000"/>
+              </a:schemeClr>
+            </a:gs>
+            <a:gs pos="100000">
+              <a:schemeClr val="phClr">
+                <a:tint val="50000"/>
+                <a:shade val="100000"/>
+                <a:satMod val="350000"/>
+              </a:schemeClr>
+            </a:gs>
+          </a:gsLst>
+          <a:lin ang="16200000" scaled="0"/>
+        </a:gradFill>
+      </a:fillStyleLst>
+      <a:lnStyleLst>
+        <a:ln w="9525" cap="flat" cmpd="sng" algn="ctr">
+          <a:solidFill>
+            <a:schemeClr val="phClr">
+              <a:shade val="95000"/>
+              <a:satMod val="105000"/>
+            </a:schemeClr>
+          </a:solidFill>
+          <a:prstDash val="solid"/>
+        </a:ln>
+        <a:ln w="25400" cap="flat" cmpd="sng" algn="ctr">
+          <a:solidFill>
+            <a:schemeClr val="phClr"/>
+          </a:solidFill>
+          <a:prstDash val="solid"/>
+        </a:ln>
+        <a:ln w="38100" cap="flat" cmpd="sng" algn="ctr">
+          <a:solidFill>
+            <a:schemeClr val="phClr"/>
+          </a:solidFill>
+          <a:prstDash val="solid"/>
+        </a:ln>
+      </a:lnStyleLst>
+      <a:effectStyleLst>
+        <a:effectStyle>
+          <a:effectLst>
+            <a:outerShdw blurRad="40000" dist="20000" dir="5400000" rotWithShape="0">
+              <a:srgbClr val="000000">
+                <a:alpha val="38000"/>
+              </a:srgbClr>
+            </a:outerShdw>
+          </a:effectLst>
+        </a:effectStyle>
+        <a:effectStyle>
+          <a:effectLst>
+            <a:outerShdw blurRad="40000" dist="23000" dir="5400000" rotWithShape="0">
+              <a:srgbClr val="000000">
+                <a:alpha val="35000"/>
+              </a:srgbClr>
+            </a:outerShdw>
+          </a:effectLst>
+        </a:effectStyle>
+        <a:effectStyle>
+          <a:effectLst>
+            <a:outerShdw blurRad="40000" dist="23000" dir="5400000" rotWithShape="0">
+              <a:srgbClr val="000000">
+                <a:alpha val="35000"/>
+              </a:srgbClr>
+            </a:outerShdw>
+          </a:effectLst>
+          <a:scene3d>
+            <a:camera prst="orthographicFront">
+              <a:rot lat="0" lon="0" rev="0"/>
+            </a:camera>
+            <a:lightRig rig="threePt" dir="t">
+              <a:rot lat="0" lon="0" rev="1200000"/>
+            </a:lightRig>
+          </a:scene3d>
+          <a:sp3d>
+            <a:bevelT w="63500" h="25400"/>
+          </a:sp3d>
+        </a:effectStyle>
+      </a:effectStyleLst>
+      <a:bgFillStyleLst>
+        <a:solidFill>
+          <a:schemeClr val="phClr"/>
+        </a:solidFill>
+        <a:gradFill rotWithShape="1">
+          <a:gsLst>
+            <a:gs pos="0">
+              <a:schemeClr val="phClr">
+                <a:tint val="40000"/>
+                <a:satMod val="350000"/>
+              </a:schemeClr>
+            </a:gs>
+            <a:gs pos="40000">
+              <a:schemeClr val="phClr">
+                <a:tint val="45000"/>
+                <a:shade val="99000"/>
+                <a:satMod val="350000"/>
+              </a:schemeClr>
+            </a:gs>
+            <a:gs pos="100000">
+              <a:schemeClr val="phClr">
+                <a:shade val="20000"/>
+                <a:satMod val="255000"/>
+              </a:schemeClr>
+            </a:gs>
+          </a:gsLst>
+          <a:path path="circle">
+            <a:fillToRect l="50000" t="-80000" r="50000" b="180000"/>
+          </a:path>
+        </a:gradFill>
+        <a:gradFill rotWithShape="1">
+          <a:gsLst>
+            <a:gs pos="0">
+              <a:schemeClr val="phClr">
+                <a:tint val="80000"/>
+                <a:satMod val="300000"/>
+              </a:schemeClr>
+            </a:gs>
+            <a:gs pos="100000">
+              <a:schemeClr val="phClr">
+                <a:shade val="30000"/>
+                <a:satMod val="200000"/>
+              </a:schemeClr>
+            </a:gs>
+          </a:gsLst>
+          <a:path path="circle">
+            <a:fillToRect l="50000" t="50000" r="50000" b="50000"/>
+          </a:path>
+        </a:gradFill>
+      </a:bgFillStyleLst>
+    </a:fmtScheme>
+  </a:themeElements>
+  <a:objectDefaults>
+    <a:spDef>
+      <a:spPr/>
+      <a:bodyPr/>
+      <a:lstStyle/>
+      <a:style>
+        <a:lnRef idx="1">
+          <a:schemeClr val="accent1"/>
+        </a:lnRef>
+        <a:fillRef idx="3">
+          <a:schemeClr val="accent1"/>
+        </a:fillRef>
+        <a:effectRef idx="2">
+          <a:schemeClr val="accent1"/>
+        </a:effectRef>
+        <a:fontRef idx="minor">
+          <a:schemeClr val="lt1"/>
+        </a:fontRef>
+      </a:style>
+    </a:spDef>
+    <a:lnDef>
+      <a:spPr/>
+      <a:bodyPr/>
+      <a:lstStyle/>
+      <a:style>
+        <a:lnRef idx="2">
+          <a:schemeClr val="accent1"/>
+        </a:lnRef>
+        <a:fillRef idx="0">
+          <a:schemeClr val="accent1"/>
+        </a:fillRef>
+        <a:effectRef idx="1">
+          <a:schemeClr val="accent1"/>
+        </a:effectRef>
+        <a:fontRef idx="minor">
+          <a:schemeClr val="tx1"/>
+        </a:fontRef>
+      </a:style>
+    </a:lnDef>
+  </a:objectDefaults>
+  <a:extraClrSchemeLst/>
+</a:theme>
 </file>
--- a/S1-CL1-Cloud-Design-Build/delivery/topic_08/Topic_08b_Slides.pptx
+++ b/S1-CL1-Cloud-Design-Build/delivery/topic_08/Topic_08b_Slides.pptx
@@ -536,7 +536,7 @@
           </a:p>
           <a:p>
             <a:r>
-              <a:t>  storage (Amazon S3 + Glacier). Same design, same network — now the tiers that hold the data.</a:t>
+              <a:t>storage (Amazon S3 + Glacier). Same design, same network — now the tiers that hold the data.</a:t>
             </a:r>
           </a:p>
           <a:p>
@@ -546,7 +546,7 @@
           </a:p>
           <a:p>
             <a:r>
-              <a:t>  they go. Nothing free-hand.</a:t>
+              <a:t>they go. Nothing free-hand.</a:t>
             </a:r>
           </a:p>
           <a:p>
@@ -666,7 +666,7 @@
           </a:p>
           <a:p>
             <a:r>
-              <a:t>  because it's cold, not instant.</a:t>
+              <a:t>because it's cold, not instant.</a:t>
             </a:r>
           </a:p>
           <a:p>
@@ -676,7 +676,7 @@
           </a:p>
           <a:p>
             <a:r>
-              <a:t>  cheaper the longer data lives. Set once, runs forever; no one moves files by hand.</a:t>
+              <a:t>cheaper the longer data lives. Set once, runs forever; no one moves files by hand.</a:t>
             </a:r>
           </a:p>
           <a:p>
@@ -686,7 +686,7 @@
           </a:p>
           <a:p>
             <a:r>
-              <a:t>  is the integrity guarantee auditors want on financial records.</a:t>
+              <a:t>is the integrity guarantee auditors want on financial records.</a:t>
             </a:r>
           </a:p>
           <a:p>
@@ -696,7 +696,7 @@
           </a:p>
           <a:p>
             <a:r>
-              <a:t>  requirement, met by a rule, evidenced.</a:t>
+              <a:t>requirement, met by a rule, evidenced.</a:t>
             </a:r>
           </a:p>
           <a:p>
@@ -811,7 +811,7 @@
           </a:p>
           <a:p>
             <a:r>
-              <a:t>  hold. This bucket is where the retention rule lives.</a:t>
+              <a:t>hold. This bucket is where the retention rule lives.</a:t>
             </a:r>
           </a:p>
           <a:p>
@@ -821,7 +821,7 @@
           </a:p>
           <a:p>
             <a:r>
-              <a:t>  automated backups; belt and braces).</a:t>
+              <a:t>automated backups; belt and braces).</a:t>
             </a:r>
           </a:p>
           <a:p>
@@ -831,7 +831,7 @@
           </a:p>
           <a:p>
             <a:r>
-              <a:t>  logging. Same three protections from the S3 teach, applied.</a:t>
+              <a:t>logging. Same three protections from the S3 teach, applied.</a:t>
             </a:r>
           </a:p>
           <a:p>
@@ -841,7 +841,7 @@
           </a:p>
           <a:p>
             <a:r>
-              <a:t>  Documents bucket, not an afterthought.</a:t>
+              <a:t>Documents bucket, not an afterthought.</a:t>
             </a:r>
           </a:p>
           <a:p>
@@ -1003,7 +1003,7 @@
           </a:p>
           <a:p>
             <a:r>
-              <a:t>  for financial data.</a:t>
+              <a:t>for financial data.</a:t>
             </a:r>
           </a:p>
           <a:p>
@@ -1018,7 +1018,7 @@
           </a:p>
           <a:p>
             <a:r>
-              <a:t>  requirement made real (use the ACA M04 lifecycle demo here).</a:t>
+              <a:t>requirement made real (use the ACA M04 lifecycle demo here).</a:t>
             </a:r>
           </a:p>
           <a:p>
@@ -1279,7 +1279,7 @@
           </a:p>
           <a:p>
             <a:r>
-              <a:t>  accounts, ledgers and transactions are exactly this shape.</a:t>
+              <a:t>accounts, ledgers and transactions are exactly this shape.</a:t>
             </a:r>
           </a:p>
           <a:p>
@@ -1289,7 +1289,7 @@
           </a:p>
           <a:p>
             <a:r>
-              <a:t>  test backups, secure it, scale it. That work never goes away — the only question is WHO does it.</a:t>
+              <a:t>test backups, secure it, scale it. That work never goes away — the only question is WHO does it.</a:t>
             </a:r>
           </a:p>
           <a:p>
@@ -1299,7 +1299,7 @@
           </a:p>
           <a:p>
             <a:r>
-              <a:t>  the cloud provider does it. Plant this now; RDS is the payoff two slides on.</a:t>
+              <a:t>the cloud provider does it. Plant this now; RDS is the payoff two slides on.</a:t>
             </a:r>
           </a:p>
           <a:p>
@@ -1409,7 +1409,7 @@
           </a:p>
           <a:p>
             <a:r>
-              <a:t>  backups, scaling, availability). Control has a labour cost.</a:t>
+              <a:t>backups, scaling, availability). Control has a labour cost.</a:t>
             </a:r>
           </a:p>
           <a:p>
@@ -1419,7 +1419,7 @@
           </a:p>
           <a:p>
             <a:r>
-              <a:t>  backups, scaling and availability. The toil from the last slide is offloaded.</a:t>
+              <a:t>backups, scaling and availability. The toil from the last slide is offloaded.</a:t>
             </a:r>
           </a:p>
           <a:p>
@@ -1429,7 +1429,7 @@
           </a:p>
           <a:p>
             <a:r>
-              <a:t>  "hands off everything," it's "hands off the undifferentiated ops."</a:t>
+              <a:t>"hands off everything," it's "hands off the undifferentiated ops."</a:t>
             </a:r>
           </a:p>
           <a:p>
@@ -1439,7 +1439,7 @@
           </a:p>
           <a:p>
             <a:r>
-              <a:t>  control. For a small RTO with thin cloud skills, managed is the obvious call.</a:t>
+              <a:t>control. For a small RTO with thin cloud skills, managed is the obvious call.</a:t>
             </a:r>
           </a:p>
           <a:p>
@@ -1544,7 +1544,7 @@
           </a:p>
           <a:p>
             <a:r>
-              <a:t>  Server (Ledgerline's engine — preserved, not migrated to something new).</a:t>
+              <a:t>Server (Ledgerline's engine — preserved, not migrated to something new).</a:t>
             </a:r>
           </a:p>
           <a:p>
@@ -1554,7 +1554,7 @@
           </a:p>
           <a:p>
             <a:r>
-              <a:t>  provisioned IOPS). Same mental model as sizing an EC2 instance in 8a.</a:t>
+              <a:t>provisioned IOPS). Same mental model as sizing an EC2 instance in 8a.</a:t>
             </a:r>
           </a:p>
           <a:p>
@@ -1564,7 +1564,7 @@
           </a:p>
           <a:p>
             <a:r>
-              <a:t>  restore; encryption at rest is available. Tie each back to the network they built in Topic 7.</a:t>
+              <a:t>restore; encryption at rest is available. Tie each back to the network they built in Topic 7.</a:t>
             </a:r>
           </a:p>
           <a:p>
@@ -1574,7 +1574,7 @@
           </a:p>
           <a:p>
             <a:r>
-              <a:t>  it: it's deferred to AT3. Baseline here is single-AZ.</a:t>
+              <a:t>it: it's deferred to AT3. Baseline here is single-AZ.</a:t>
             </a:r>
           </a:p>
           <a:p>
@@ -1689,7 +1689,7 @@
           </a:p>
           <a:p>
             <a:r>
-              <a:t>  re-platform.</a:t>
+              <a:t>re-platform.</a:t>
             </a:r>
           </a:p>
           <a:p>
@@ -1699,7 +1699,7 @@
           </a:p>
           <a:p>
             <a:r>
-              <a:t>  private-data-a, locked to sg-db, NOT public. Every one of those is a design mandate.</a:t>
+              <a:t>private-data-a, locked to sg-db, NOT public. Every one of those is a design mandate.</a:t>
             </a:r>
           </a:p>
           <a:p>
@@ -1714,7 +1714,7 @@
           </a:p>
           <a:p>
             <a:r>
-              <a:t>  migration are YAT ICT's responsibility. Students build the container, not the contents.</a:t>
+              <a:t>migration are YAT ICT's responsibility. Students build the container, not the contents.</a:t>
             </a:r>
           </a:p>
           <a:p>
@@ -1850,7 +1850,7 @@
           </a:p>
           <a:p>
             <a:r>
-              <a:t>   backup settings.</a:t>
+              <a:t>backup settings.</a:t>
             </a:r>
           </a:p>
           <a:p>
@@ -1871,7 +1871,7 @@
           </a:p>
           <a:p>
             <a:r>
-              <a:t>  public. This is the network discipline from Topic 7 paying off.</a:t>
+              <a:t>public. This is the network discipline from Topic 7 paying off.</a:t>
             </a:r>
           </a:p>
           <a:p>
@@ -1881,7 +1881,7 @@
           </a:p>
           <a:p>
             <a:r>
-              <a:t>  backup demo here). Leave Multi-AZ OFF — say out loud that HA is AT3.</a:t>
+              <a:t>backup demo here). Leave Multi-AZ OFF — say out loud that HA is AT3.</a:t>
             </a:r>
           </a:p>
           <a:p>
@@ -2007,7 +2007,7 @@
           </a:p>
           <a:p>
             <a:r>
-              <a:t>   public.</a:t>
+              <a:t>public.</a:t>
             </a:r>
           </a:p>
           <a:p>
@@ -2022,7 +2022,7 @@
           </a:p>
           <a:p>
             <a:r>
-              <a:t>   errors.</a:t>
+              <a:t>errors.</a:t>
             </a:r>
           </a:p>
           <a:p>
@@ -2157,7 +2157,7 @@
           </a:p>
           <a:p>
             <a:r>
-              <a:t>  file in place. This is the EC2 disk from 8a; students already met it.</a:t>
+              <a:t>file in place. This is the EC2 disk from 8a; students already met it.</a:t>
             </a:r>
           </a:p>
           <a:p>
@@ -2167,7 +2167,7 @@
           </a:p>
           <a:p>
             <a:r>
-              <a:t>  unlimited (S3). You replace a whole object; no OS mounts it like a drive.</a:t>
+              <a:t>unlimited (S3). You replace a whole object; no OS mounts it like a drive.</a:t>
             </a:r>
           </a:p>
           <a:p>
@@ -2287,7 +2287,7 @@
           </a:p>
           <a:p>
             <a:r>
-              <a:t>  plainly — you effectively don't lose objects).</a:t>
+              <a:t>plainly — you effectively don't lose objects).</a:t>
             </a:r>
           </a:p>
           <a:p>
@@ -2297,7 +2297,7 @@
           </a:p>
           <a:p>
             <a:r>
-              <a:t>  settings). The name being global trips students up — flag it.</a:t>
+              <a:t>settings). The name being global trips students up — flag it.</a:t>
             </a:r>
           </a:p>
           <a:p>
@@ -2307,7 +2307,7 @@
           </a:p>
           <a:p>
             <a:r>
-              <a:t>  For a client holding financial records these aren't optional niceties — they're the baseline.</a:t>
+              <a:t>For a client holding financial records these aren't optional niceties — they're the baseline.</a:t>
             </a:r>
           </a:p>
           <a:p>
@@ -2317,7 +2317,7 @@
           </a:p>
           <a:p>
             <a:r>
-              <a:t>  and off-instance backups.</a:t>
+              <a:t>and off-instance backups.</a:t>
             </a:r>
           </a:p>
           <a:p>
@@ -6381,7 +6381,7 @@
                 </a:solidFill>
                 <a:latin typeface="Roboto"/>
               </a:rPr>
-              <a:t>02</a:t>
+              <a:t>04</a:t>
             </a:r>
           </a:p>
         </p:txBody>
@@ -6761,16 +6761,16 @@
             <a:r>
               <a:rPr sz="2400" b="1" i="0">
                 <a:solidFill>
-                  <a:srgbClr val="27B5CE"/>
+                  <a:srgbClr val="EDAB0C"/>
                 </a:solidFill>
                 <a:latin typeface="Roboto"/>
               </a:rPr>
               <a:t>■  </a:t>
             </a:r>
             <a:r>
-              <a:rPr sz="2400" b="1" i="0">
-                <a:solidFill>
-                  <a:srgbClr val="27B5CE"/>
+              <a:rPr sz="2400" b="0" i="0">
+                <a:solidFill>
+                  <a:srgbClr val="2A2929"/>
                 </a:solidFill>
                 <a:latin typeface="Roboto"/>
               </a:rPr>
@@ -7181,16 +7181,16 @@
             <a:r>
               <a:rPr sz="2400" b="1" i="0">
                 <a:solidFill>
-                  <a:srgbClr val="27B5CE"/>
+                  <a:srgbClr val="EDAB0C"/>
                 </a:solidFill>
                 <a:latin typeface="Roboto"/>
               </a:rPr>
               <a:t>■  </a:t>
             </a:r>
             <a:r>
-              <a:rPr sz="2400" b="1" i="0">
-                <a:solidFill>
-                  <a:srgbClr val="27B5CE"/>
+              <a:rPr sz="2400" b="0" i="0">
+                <a:solidFill>
+                  <a:srgbClr val="2A2929"/>
                 </a:solidFill>
                 <a:latin typeface="Roboto"/>
               </a:rPr>
@@ -7539,16 +7539,16 @@
             <a:r>
               <a:rPr sz="2400" b="1" i="0">
                 <a:solidFill>
-                  <a:srgbClr val="27B5CE"/>
+                  <a:srgbClr val="EDAB0C"/>
                 </a:solidFill>
                 <a:latin typeface="Roboto"/>
               </a:rPr>
               <a:t>■  </a:t>
             </a:r>
             <a:r>
-              <a:rPr sz="2400" b="1" i="0">
-                <a:solidFill>
-                  <a:srgbClr val="27B5CE"/>
+              <a:rPr sz="2400" b="0" i="0">
+                <a:solidFill>
+                  <a:srgbClr val="2A2929"/>
                 </a:solidFill>
                 <a:latin typeface="Roboto"/>
               </a:rPr>
@@ -7959,16 +7959,16 @@
             <a:r>
               <a:rPr sz="2400" b="1" i="0">
                 <a:solidFill>
-                  <a:srgbClr val="27B5CE"/>
+                  <a:srgbClr val="EDAB0C"/>
                 </a:solidFill>
                 <a:latin typeface="Roboto"/>
               </a:rPr>
               <a:t>■  </a:t>
             </a:r>
             <a:r>
-              <a:rPr sz="2400" b="1" i="0">
-                <a:solidFill>
-                  <a:srgbClr val="27B5CE"/>
+              <a:rPr sz="2400" b="0" i="0">
+                <a:solidFill>
+                  <a:srgbClr val="2A2929"/>
                 </a:solidFill>
                 <a:latin typeface="Roboto"/>
               </a:rPr>
@@ -8805,7 +8805,7 @@
               <a:t>■  </a:t>
             </a:r>
             <a:r>
-              <a:rPr sz="1700" b="1" i="0">
+              <a:rPr sz="1700" b="0" i="0">
                 <a:solidFill>
                   <a:srgbClr val="2A2929"/>
                 </a:solidFill>
@@ -8922,16 +8922,16 @@
             <a:r>
               <a:rPr sz="1700" b="1" i="0">
                 <a:solidFill>
-                  <a:srgbClr val="27B5CE"/>
+                  <a:srgbClr val="EDAB0C"/>
                 </a:solidFill>
                 <a:latin typeface="Roboto"/>
               </a:rPr>
               <a:t>■  </a:t>
             </a:r>
             <a:r>
-              <a:rPr sz="1700" b="1" i="0">
-                <a:solidFill>
-                  <a:srgbClr val="27B5CE"/>
+              <a:rPr sz="1700" b="0" i="0">
+                <a:solidFill>
+                  <a:srgbClr val="2A2929"/>
                 </a:solidFill>
                 <a:latin typeface="Roboto"/>
               </a:rPr>
@@ -9967,7 +9967,7 @@
             <a:r>
               <a:rPr sz="1800" b="1" i="0">
                 <a:solidFill>
-                  <a:srgbClr val="EDAB0C"/>
+                  <a:srgbClr val="27B5CE"/>
                 </a:solidFill>
                 <a:latin typeface="Roboto"/>
               </a:rPr>
@@ -9991,7 +9991,7 @@
             <a:avLst/>
           </a:prstGeom>
           <a:solidFill>
-            <a:srgbClr val="EDAB0C"/>
+            <a:srgbClr val="27B5CE"/>
           </a:solidFill>
           <a:ln>
             <a:noFill/>
@@ -10081,7 +10081,7 @@
             <a:avLst/>
           </a:prstGeom>
           <a:solidFill>
-            <a:srgbClr val="EDAB0C"/>
+            <a:srgbClr val="27B5CE"/>
           </a:solidFill>
           <a:ln>
             <a:noFill/>
@@ -10210,7 +10210,7 @@
             <a:avLst/>
           </a:prstGeom>
           <a:solidFill>
-            <a:srgbClr val="EDAB0C"/>
+            <a:srgbClr val="27B5CE"/>
           </a:solidFill>
           <a:ln>
             <a:noFill/>
@@ -10339,7 +10339,7 @@
             <a:avLst/>
           </a:prstGeom>
           <a:solidFill>
-            <a:srgbClr val="EDAB0C"/>
+            <a:srgbClr val="27B5CE"/>
           </a:solidFill>
           <a:ln>
             <a:noFill/>
@@ -10468,7 +10468,7 @@
             <a:avLst/>
           </a:prstGeom>
           <a:solidFill>
-            <a:srgbClr val="EDAB0C"/>
+            <a:srgbClr val="27B5CE"/>
           </a:solidFill>
           <a:ln>
             <a:noFill/>
@@ -10597,7 +10597,7 @@
             <a:avLst/>
           </a:prstGeom>
           <a:solidFill>
-            <a:srgbClr val="EDAB0C"/>
+            <a:srgbClr val="27B5CE"/>
           </a:solidFill>
           <a:ln>
             <a:noFill/>
@@ -10680,7 +10680,7 @@
             <a:avLst/>
           </a:prstGeom>
           <a:solidFill>
-            <a:srgbClr val="EDAB0C"/>
+            <a:srgbClr val="27B5CE"/>
           </a:solidFill>
           <a:ln>
             <a:noFill/>
@@ -10974,16 +10974,16 @@
             <a:r>
               <a:rPr sz="2400" b="1" i="0">
                 <a:solidFill>
-                  <a:srgbClr val="92268F"/>
+                  <a:srgbClr val="EDAB0C"/>
                 </a:solidFill>
                 <a:latin typeface="Roboto"/>
               </a:rPr>
               <a:t>■  </a:t>
             </a:r>
             <a:r>
-              <a:rPr sz="2400" b="1" i="0">
-                <a:solidFill>
-                  <a:srgbClr val="92268F"/>
+              <a:rPr sz="2400" b="0" i="0">
+                <a:solidFill>
+                  <a:srgbClr val="2A2929"/>
                 </a:solidFill>
                 <a:latin typeface="Roboto"/>
               </a:rPr>
@@ -11417,7 +11417,7 @@
                 </a:solidFill>
                 <a:latin typeface="Roboto"/>
               </a:rPr>
-              <a:t>01</a:t>
+              <a:t>03</a:t>
             </a:r>
           </a:p>
         </p:txBody>
@@ -11828,16 +11828,16 @@
             <a:r>
               <a:rPr sz="2400" b="1" i="0">
                 <a:solidFill>
-                  <a:srgbClr val="92268F"/>
+                  <a:srgbClr val="EDAB0C"/>
                 </a:solidFill>
                 <a:latin typeface="Roboto"/>
               </a:rPr>
               <a:t>■  </a:t>
             </a:r>
             <a:r>
-              <a:rPr sz="2400" b="1" i="0">
-                <a:solidFill>
-                  <a:srgbClr val="92268F"/>
+              <a:rPr sz="2400" b="0" i="0">
+                <a:solidFill>
+                  <a:srgbClr val="2A2929"/>
                 </a:solidFill>
                 <a:latin typeface="Roboto"/>
               </a:rPr>
@@ -12155,16 +12155,16 @@
             <a:r>
               <a:rPr sz="2400" b="1" i="0">
                 <a:solidFill>
-                  <a:srgbClr val="92268F"/>
+                  <a:srgbClr val="EDAB0C"/>
                 </a:solidFill>
                 <a:latin typeface="Roboto"/>
               </a:rPr>
               <a:t>■  </a:t>
             </a:r>
             <a:r>
-              <a:rPr sz="2400" b="1" i="0">
-                <a:solidFill>
-                  <a:srgbClr val="92268F"/>
+              <a:rPr sz="2400" b="0" i="0">
+                <a:solidFill>
+                  <a:srgbClr val="2A2929"/>
                 </a:solidFill>
                 <a:latin typeface="Roboto"/>
               </a:rPr>
@@ -12606,16 +12606,16 @@
             <a:r>
               <a:rPr sz="2400" b="1" i="0">
                 <a:solidFill>
-                  <a:srgbClr val="92268F"/>
+                  <a:srgbClr val="EDAB0C"/>
                 </a:solidFill>
                 <a:latin typeface="Roboto"/>
               </a:rPr>
               <a:t>■  </a:t>
             </a:r>
             <a:r>
-              <a:rPr sz="2400" b="1" i="0">
-                <a:solidFill>
-                  <a:srgbClr val="92268F"/>
+              <a:rPr sz="2400" b="0" i="0">
+                <a:solidFill>
+                  <a:srgbClr val="2A2929"/>
                 </a:solidFill>
                 <a:latin typeface="Roboto"/>
               </a:rPr>
@@ -12995,16 +12995,16 @@
             <a:r>
               <a:rPr sz="2400" b="1" i="0">
                 <a:solidFill>
-                  <a:srgbClr val="92268F"/>
+                  <a:srgbClr val="EDAB0C"/>
                 </a:solidFill>
                 <a:latin typeface="Roboto"/>
               </a:rPr>
               <a:t>■  </a:t>
             </a:r>
             <a:r>
-              <a:rPr sz="2400" b="1" i="0">
-                <a:solidFill>
-                  <a:srgbClr val="92268F"/>
+              <a:rPr sz="2400" b="0" i="0">
+                <a:solidFill>
+                  <a:srgbClr val="2A2929"/>
                 </a:solidFill>
                 <a:latin typeface="Roboto"/>
               </a:rPr>
@@ -13810,7 +13810,7 @@
               <a:t>■  </a:t>
             </a:r>
             <a:r>
-              <a:rPr sz="1700" b="1" i="0">
+              <a:rPr sz="1700" b="0" i="0">
                 <a:solidFill>
                   <a:srgbClr val="2A2929"/>
                 </a:solidFill>
@@ -13896,16 +13896,16 @@
             <a:r>
               <a:rPr sz="1700" b="1" i="0">
                 <a:solidFill>
-                  <a:srgbClr val="92268F"/>
+                  <a:srgbClr val="EDAB0C"/>
                 </a:solidFill>
                 <a:latin typeface="Roboto"/>
               </a:rPr>
               <a:t>■  </a:t>
             </a:r>
             <a:r>
-              <a:rPr sz="1700" b="1" i="0">
-                <a:solidFill>
-                  <a:srgbClr val="92268F"/>
+              <a:rPr sz="1700" b="0" i="0">
+                <a:solidFill>
+                  <a:srgbClr val="2A2929"/>
                 </a:solidFill>
                 <a:latin typeface="Roboto"/>
               </a:rPr>
